--- a/resume/pdf/Presentation.pptx
+++ b/resume/pdf/Presentation.pptx
@@ -25,7 +25,6 @@
     <p:sldId id="270" r:id="rId19"/>
     <p:sldId id="271" r:id="rId20"/>
     <p:sldId id="272" r:id="rId21"/>
-    <p:sldId id="273" r:id="rId22"/>
   </p:sldIdLst>
   <p:sldSz cy="5143500" cx="9144000"/>
   <p:notesSz cx="6858000" cy="9144000"/>
@@ -805,7 +804,7 @@
   <p:cSld>
     <p:spTree>
       <p:nvGrpSpPr>
-        <p:cNvPr id="141" name="Shape 141"/>
+        <p:cNvPr id="140" name="Shape 140"/>
         <p:cNvGrpSpPr/>
         <p:nvPr/>
       </p:nvGrpSpPr>
@@ -819,7 +818,7 @@
       </p:grpSpPr>
       <p:sp>
         <p:nvSpPr>
-          <p:cNvPr id="142" name="Google Shape;142;g4fdfc557cb_0_1:notes"/>
+          <p:cNvPr id="141" name="Google Shape;141;g29ee01136d_0_77:notes"/>
           <p:cNvSpPr txBox="1"/>
           <p:nvPr>
             <p:ph idx="1" type="body"/>
@@ -828,7 +827,7 @@
         <p:spPr>
           <a:xfrm>
             <a:off x="685800" y="4344025"/>
-            <a:ext cx="5486400" cy="4114500"/>
+            <a:ext cx="5486400" cy="4114488"/>
           </a:xfrm>
           <a:prstGeom prst="rect">
             <a:avLst/>
@@ -862,7 +861,7 @@
       </p:sp>
       <p:sp>
         <p:nvSpPr>
-          <p:cNvPr id="143" name="Google Shape;143;g4fdfc557cb_0_1:notes"/>
+          <p:cNvPr id="142" name="Google Shape;142;g29ee01136d_0_77:notes"/>
           <p:cNvSpPr/>
           <p:nvPr>
             <p:ph idx="2" type="sldImg"/>
@@ -871,7 +870,7 @@
         <p:spPr>
           <a:xfrm>
             <a:off x="1742607" y="685800"/>
-            <a:ext cx="3372900" cy="3429000"/>
+            <a:ext cx="3372787" cy="3429000"/>
           </a:xfrm>
           <a:custGeom>
             <a:rect b="b" l="l" r="r" t="t"/>
@@ -922,7 +921,209 @@
       </p:grpSpPr>
       <p:sp>
         <p:nvSpPr>
-          <p:cNvPr id="149" name="Google Shape;149;g29ee01136d_0_77:notes"/>
+          <p:cNvPr id="149" name="Google Shape;149;g29ee01136d_0_84:notes"/>
+          <p:cNvSpPr txBox="1"/>
+          <p:nvPr>
+            <p:ph idx="1" type="body"/>
+          </p:nvPr>
+        </p:nvSpPr>
+        <p:spPr>
+          <a:xfrm>
+            <a:off x="685800" y="4344025"/>
+            <a:ext cx="5486400" cy="4114500"/>
+          </a:xfrm>
+          <a:prstGeom prst="rect">
+            <a:avLst/>
+          </a:prstGeom>
+          <a:noFill/>
+          <a:ln>
+            <a:noFill/>
+          </a:ln>
+        </p:spPr>
+        <p:txBody>
+          <a:bodyPr anchorCtr="0" anchor="ctr" bIns="91425" lIns="91425" spcFirstLastPara="1" rIns="91425" wrap="square" tIns="91425">
+            <a:noAutofit/>
+          </a:bodyPr>
+          <a:lstStyle/>
+          <a:p>
+            <a:pPr indent="0" lvl="0" marL="0" rtl="0" algn="l">
+              <a:spcBef>
+                <a:spcPts val="0"/>
+              </a:spcBef>
+              <a:spcAft>
+                <a:spcPts val="0"/>
+              </a:spcAft>
+              <a:buNone/>
+            </a:pPr>
+            <a:r>
+              <a:t/>
+            </a:r>
+            <a:endParaRPr/>
+          </a:p>
+        </p:txBody>
+      </p:sp>
+      <p:sp>
+        <p:nvSpPr>
+          <p:cNvPr id="150" name="Google Shape;150;g29ee01136d_0_84:notes"/>
+          <p:cNvSpPr/>
+          <p:nvPr>
+            <p:ph idx="2" type="sldImg"/>
+          </p:nvPr>
+        </p:nvSpPr>
+        <p:spPr>
+          <a:xfrm>
+            <a:off x="1742607" y="685800"/>
+            <a:ext cx="3372900" cy="3429000"/>
+          </a:xfrm>
+          <a:custGeom>
+            <a:rect b="b" l="l" r="r" t="t"/>
+            <a:pathLst>
+              <a:path extrusionOk="0" h="120000" w="120000">
+                <a:moveTo>
+                  <a:pt x="0" y="0"/>
+                </a:moveTo>
+                <a:lnTo>
+                  <a:pt x="120000" y="0"/>
+                </a:lnTo>
+                <a:lnTo>
+                  <a:pt x="120000" y="120000"/>
+                </a:lnTo>
+                <a:lnTo>
+                  <a:pt x="0" y="120000"/>
+                </a:lnTo>
+                <a:close/>
+              </a:path>
+            </a:pathLst>
+          </a:custGeom>
+        </p:spPr>
+      </p:sp>
+    </p:spTree>
+  </p:cSld>
+  <p:clrMapOvr>
+    <a:masterClrMapping/>
+  </p:clrMapOvr>
+</p:notes>
+</file>
+
+<file path=ppt/notesSlides/notesSlide12.xml><?xml version="1.0" encoding="utf-8"?>
+<p:notes xmlns:a="http://schemas.openxmlformats.org/drawingml/2006/main" xmlns:r="http://schemas.openxmlformats.org/officeDocument/2006/relationships" xmlns:mc="http://schemas.openxmlformats.org/markup-compatibility/2006" xmlns:mv="urn:schemas-microsoft-com:mac:vml" xmlns:p="http://schemas.openxmlformats.org/presentationml/2006/main" xmlns:c="http://schemas.openxmlformats.org/drawingml/2006/chart" xmlns:dgm="http://schemas.openxmlformats.org/drawingml/2006/diagram" xmlns:o="urn:schemas-microsoft-com:office:office" xmlns:v="urn:schemas-microsoft-com:vml" xmlns:pvml="urn:schemas-microsoft-com:office:powerpoint" xmlns:com="http://schemas.openxmlformats.org/drawingml/2006/compatibility" xmlns:p14="http://schemas.microsoft.com/office/powerpoint/2010/main" xmlns:p15="http://schemas.microsoft.com/office/powerpoint/2012/main" showMasterPhAnim="0" showMasterSp="0">
+  <p:cSld>
+    <p:spTree>
+      <p:nvGrpSpPr>
+        <p:cNvPr id="157" name="Shape 157"/>
+        <p:cNvGrpSpPr/>
+        <p:nvPr/>
+      </p:nvGrpSpPr>
+      <p:grpSpPr>
+        <a:xfrm>
+          <a:off x="0" y="0"/>
+          <a:ext cx="0" cy="0"/>
+          <a:chOff x="0" y="0"/>
+          <a:chExt cx="0" cy="0"/>
+        </a:xfrm>
+      </p:grpSpPr>
+      <p:sp>
+        <p:nvSpPr>
+          <p:cNvPr id="158" name="Google Shape;158;g29fc165235_0_7:notes"/>
+          <p:cNvSpPr/>
+          <p:nvPr>
+            <p:ph idx="2" type="sldImg"/>
+          </p:nvPr>
+        </p:nvSpPr>
+        <p:spPr>
+          <a:xfrm>
+            <a:off x="381300" y="685800"/>
+            <a:ext cx="6096000" cy="3429000"/>
+          </a:xfrm>
+          <a:custGeom>
+            <a:rect b="b" l="l" r="r" t="t"/>
+            <a:pathLst>
+              <a:path extrusionOk="0" h="120000" w="120000">
+                <a:moveTo>
+                  <a:pt x="0" y="0"/>
+                </a:moveTo>
+                <a:lnTo>
+                  <a:pt x="120000" y="0"/>
+                </a:lnTo>
+                <a:lnTo>
+                  <a:pt x="120000" y="120000"/>
+                </a:lnTo>
+                <a:lnTo>
+                  <a:pt x="0" y="120000"/>
+                </a:lnTo>
+                <a:close/>
+              </a:path>
+            </a:pathLst>
+          </a:custGeom>
+        </p:spPr>
+      </p:sp>
+      <p:sp>
+        <p:nvSpPr>
+          <p:cNvPr id="159" name="Google Shape;159;g29fc165235_0_7:notes"/>
+          <p:cNvSpPr txBox="1"/>
+          <p:nvPr>
+            <p:ph idx="1" type="body"/>
+          </p:nvPr>
+        </p:nvSpPr>
+        <p:spPr>
+          <a:xfrm>
+            <a:off x="685800" y="4343400"/>
+            <a:ext cx="5486400" cy="4114800"/>
+          </a:xfrm>
+          <a:prstGeom prst="rect">
+            <a:avLst/>
+          </a:prstGeom>
+        </p:spPr>
+        <p:txBody>
+          <a:bodyPr anchorCtr="0" anchor="t" bIns="91425" lIns="91425" spcFirstLastPara="1" rIns="91425" wrap="square" tIns="91425">
+            <a:noAutofit/>
+          </a:bodyPr>
+          <a:lstStyle/>
+          <a:p>
+            <a:pPr indent="0" lvl="0" marL="0" rtl="0" algn="l">
+              <a:spcBef>
+                <a:spcPts val="0"/>
+              </a:spcBef>
+              <a:spcAft>
+                <a:spcPts val="0"/>
+              </a:spcAft>
+              <a:buNone/>
+            </a:pPr>
+            <a:r>
+              <a:t/>
+            </a:r>
+            <a:endParaRPr/>
+          </a:p>
+        </p:txBody>
+      </p:sp>
+    </p:spTree>
+  </p:cSld>
+  <p:clrMapOvr>
+    <a:masterClrMapping/>
+  </p:clrMapOvr>
+</p:notes>
+</file>
+
+<file path=ppt/notesSlides/notesSlide13.xml><?xml version="1.0" encoding="utf-8"?>
+<p:notes xmlns:a="http://schemas.openxmlformats.org/drawingml/2006/main" xmlns:r="http://schemas.openxmlformats.org/officeDocument/2006/relationships" xmlns:mc="http://schemas.openxmlformats.org/markup-compatibility/2006" xmlns:mv="urn:schemas-microsoft-com:mac:vml" xmlns:p="http://schemas.openxmlformats.org/presentationml/2006/main" xmlns:c="http://schemas.openxmlformats.org/drawingml/2006/chart" xmlns:dgm="http://schemas.openxmlformats.org/drawingml/2006/diagram" xmlns:o="urn:schemas-microsoft-com:office:office" xmlns:v="urn:schemas-microsoft-com:vml" xmlns:pvml="urn:schemas-microsoft-com:office:powerpoint" xmlns:com="http://schemas.openxmlformats.org/drawingml/2006/compatibility" xmlns:p14="http://schemas.microsoft.com/office/powerpoint/2010/main" xmlns:p15="http://schemas.microsoft.com/office/powerpoint/2012/main" showMasterPhAnim="0" showMasterSp="0">
+  <p:cSld>
+    <p:spTree>
+      <p:nvGrpSpPr>
+        <p:cNvPr id="169" name="Shape 169"/>
+        <p:cNvGrpSpPr/>
+        <p:nvPr/>
+      </p:nvGrpSpPr>
+      <p:grpSpPr>
+        <a:xfrm>
+          <a:off x="0" y="0"/>
+          <a:ext cx="0" cy="0"/>
+          <a:chOff x="0" y="0"/>
+          <a:chExt cx="0" cy="0"/>
+        </a:xfrm>
+      </p:grpSpPr>
+      <p:sp>
+        <p:nvSpPr>
+          <p:cNvPr id="170" name="Google Shape;170;g29ee01136d_0_219:notes"/>
           <p:cNvSpPr txBox="1"/>
           <p:nvPr>
             <p:ph idx="1" type="body"/>
@@ -965,7 +1166,7 @@
       </p:sp>
       <p:sp>
         <p:nvSpPr>
-          <p:cNvPr id="150" name="Google Shape;150;g29ee01136d_0_77:notes"/>
+          <p:cNvPr id="171" name="Google Shape;171;g29ee01136d_0_219:notes"/>
           <p:cNvSpPr/>
           <p:nvPr>
             <p:ph idx="2" type="sldImg"/>
@@ -1006,12 +1207,12 @@
 </p:notes>
 </file>
 
-<file path=ppt/notesSlides/notesSlide12.xml><?xml version="1.0" encoding="utf-8"?>
+<file path=ppt/notesSlides/notesSlide14.xml><?xml version="1.0" encoding="utf-8"?>
 <p:notes xmlns:a="http://schemas.openxmlformats.org/drawingml/2006/main" xmlns:r="http://schemas.openxmlformats.org/officeDocument/2006/relationships" xmlns:mc="http://schemas.openxmlformats.org/markup-compatibility/2006" xmlns:mv="urn:schemas-microsoft-com:mac:vml" xmlns:p="http://schemas.openxmlformats.org/presentationml/2006/main" xmlns:c="http://schemas.openxmlformats.org/drawingml/2006/chart" xmlns:dgm="http://schemas.openxmlformats.org/drawingml/2006/diagram" xmlns:o="urn:schemas-microsoft-com:office:office" xmlns:v="urn:schemas-microsoft-com:vml" xmlns:pvml="urn:schemas-microsoft-com:office:powerpoint" xmlns:com="http://schemas.openxmlformats.org/drawingml/2006/compatibility" xmlns:p14="http://schemas.microsoft.com/office/powerpoint/2010/main" xmlns:p15="http://schemas.microsoft.com/office/powerpoint/2012/main" showMasterPhAnim="0" showMasterSp="0">
   <p:cSld>
     <p:spTree>
       <p:nvGrpSpPr>
-        <p:cNvPr id="156" name="Shape 156"/>
+        <p:cNvPr id="176" name="Shape 176"/>
         <p:cNvGrpSpPr/>
         <p:nvPr/>
       </p:nvGrpSpPr>
@@ -1025,110 +1226,7 @@
       </p:grpSpPr>
       <p:sp>
         <p:nvSpPr>
-          <p:cNvPr id="157" name="Google Shape;157;g29ee01136d_0_84:notes"/>
-          <p:cNvSpPr txBox="1"/>
-          <p:nvPr>
-            <p:ph idx="1" type="body"/>
-          </p:nvPr>
-        </p:nvSpPr>
-        <p:spPr>
-          <a:xfrm>
-            <a:off x="685800" y="4344025"/>
-            <a:ext cx="5486400" cy="4114500"/>
-          </a:xfrm>
-          <a:prstGeom prst="rect">
-            <a:avLst/>
-          </a:prstGeom>
-          <a:noFill/>
-          <a:ln>
-            <a:noFill/>
-          </a:ln>
-        </p:spPr>
-        <p:txBody>
-          <a:bodyPr anchorCtr="0" anchor="ctr" bIns="91425" lIns="91425" spcFirstLastPara="1" rIns="91425" wrap="square" tIns="91425">
-            <a:noAutofit/>
-          </a:bodyPr>
-          <a:lstStyle/>
-          <a:p>
-            <a:pPr indent="0" lvl="0" marL="0" rtl="0" algn="l">
-              <a:spcBef>
-                <a:spcPts val="0"/>
-              </a:spcBef>
-              <a:spcAft>
-                <a:spcPts val="0"/>
-              </a:spcAft>
-              <a:buNone/>
-            </a:pPr>
-            <a:r>
-              <a:t/>
-            </a:r>
-            <a:endParaRPr/>
-          </a:p>
-        </p:txBody>
-      </p:sp>
-      <p:sp>
-        <p:nvSpPr>
-          <p:cNvPr id="158" name="Google Shape;158;g29ee01136d_0_84:notes"/>
-          <p:cNvSpPr/>
-          <p:nvPr>
-            <p:ph idx="2" type="sldImg"/>
-          </p:nvPr>
-        </p:nvSpPr>
-        <p:spPr>
-          <a:xfrm>
-            <a:off x="1742607" y="685800"/>
-            <a:ext cx="3372900" cy="3429000"/>
-          </a:xfrm>
-          <a:custGeom>
-            <a:rect b="b" l="l" r="r" t="t"/>
-            <a:pathLst>
-              <a:path extrusionOk="0" h="120000" w="120000">
-                <a:moveTo>
-                  <a:pt x="0" y="0"/>
-                </a:moveTo>
-                <a:lnTo>
-                  <a:pt x="120000" y="0"/>
-                </a:lnTo>
-                <a:lnTo>
-                  <a:pt x="120000" y="120000"/>
-                </a:lnTo>
-                <a:lnTo>
-                  <a:pt x="0" y="120000"/>
-                </a:lnTo>
-                <a:close/>
-              </a:path>
-            </a:pathLst>
-          </a:custGeom>
-        </p:spPr>
-      </p:sp>
-    </p:spTree>
-  </p:cSld>
-  <p:clrMapOvr>
-    <a:masterClrMapping/>
-  </p:clrMapOvr>
-</p:notes>
-</file>
-
-<file path=ppt/notesSlides/notesSlide13.xml><?xml version="1.0" encoding="utf-8"?>
-<p:notes xmlns:a="http://schemas.openxmlformats.org/drawingml/2006/main" xmlns:r="http://schemas.openxmlformats.org/officeDocument/2006/relationships" xmlns:mc="http://schemas.openxmlformats.org/markup-compatibility/2006" xmlns:mv="urn:schemas-microsoft-com:mac:vml" xmlns:p="http://schemas.openxmlformats.org/presentationml/2006/main" xmlns:c="http://schemas.openxmlformats.org/drawingml/2006/chart" xmlns:dgm="http://schemas.openxmlformats.org/drawingml/2006/diagram" xmlns:o="urn:schemas-microsoft-com:office:office" xmlns:v="urn:schemas-microsoft-com:vml" xmlns:pvml="urn:schemas-microsoft-com:office:powerpoint" xmlns:com="http://schemas.openxmlformats.org/drawingml/2006/compatibility" xmlns:p14="http://schemas.microsoft.com/office/powerpoint/2010/main" xmlns:p15="http://schemas.microsoft.com/office/powerpoint/2012/main" showMasterPhAnim="0" showMasterSp="0">
-  <p:cSld>
-    <p:spTree>
-      <p:nvGrpSpPr>
-        <p:cNvPr id="165" name="Shape 165"/>
-        <p:cNvGrpSpPr/>
-        <p:nvPr/>
-      </p:nvGrpSpPr>
-      <p:grpSpPr>
-        <a:xfrm>
-          <a:off x="0" y="0"/>
-          <a:ext cx="0" cy="0"/>
-          <a:chOff x="0" y="0"/>
-          <a:chExt cx="0" cy="0"/>
-        </a:xfrm>
-      </p:grpSpPr>
-      <p:sp>
-        <p:nvSpPr>
-          <p:cNvPr id="166" name="Google Shape;166;g29fc165235_0_7:notes"/>
+          <p:cNvPr id="177" name="Google Shape;177;g2b6929a708_0_59:notes"/>
           <p:cNvSpPr/>
           <p:nvPr>
             <p:ph idx="2" type="sldImg"/>
@@ -1163,7 +1261,7 @@
       </p:sp>
       <p:sp>
         <p:nvSpPr>
-          <p:cNvPr id="167" name="Google Shape;167;g29fc165235_0_7:notes"/>
+          <p:cNvPr id="178" name="Google Shape;178;g2b6929a708_0_59:notes"/>
           <p:cNvSpPr txBox="1"/>
           <p:nvPr>
             <p:ph idx="1" type="body"/>
@@ -1208,12 +1306,12 @@
 </p:notes>
 </file>
 
-<file path=ppt/notesSlides/notesSlide14.xml><?xml version="1.0" encoding="utf-8"?>
+<file path=ppt/notesSlides/notesSlide15.xml><?xml version="1.0" encoding="utf-8"?>
 <p:notes xmlns:a="http://schemas.openxmlformats.org/drawingml/2006/main" xmlns:r="http://schemas.openxmlformats.org/officeDocument/2006/relationships" xmlns:mc="http://schemas.openxmlformats.org/markup-compatibility/2006" xmlns:mv="urn:schemas-microsoft-com:mac:vml" xmlns:p="http://schemas.openxmlformats.org/presentationml/2006/main" xmlns:c="http://schemas.openxmlformats.org/drawingml/2006/chart" xmlns:dgm="http://schemas.openxmlformats.org/drawingml/2006/diagram" xmlns:o="urn:schemas-microsoft-com:office:office" xmlns:v="urn:schemas-microsoft-com:vml" xmlns:pvml="urn:schemas-microsoft-com:office:powerpoint" xmlns:com="http://schemas.openxmlformats.org/drawingml/2006/compatibility" xmlns:p14="http://schemas.microsoft.com/office/powerpoint/2010/main" xmlns:p15="http://schemas.microsoft.com/office/powerpoint/2012/main" showMasterPhAnim="0" showMasterSp="0">
   <p:cSld>
     <p:spTree>
       <p:nvGrpSpPr>
-        <p:cNvPr id="177" name="Shape 177"/>
+        <p:cNvPr id="183" name="Shape 183"/>
         <p:cNvGrpSpPr/>
         <p:nvPr/>
       </p:nvGrpSpPr>
@@ -1227,110 +1325,7 @@
       </p:grpSpPr>
       <p:sp>
         <p:nvSpPr>
-          <p:cNvPr id="178" name="Google Shape;178;g29ee01136d_0_219:notes"/>
-          <p:cNvSpPr txBox="1"/>
-          <p:nvPr>
-            <p:ph idx="1" type="body"/>
-          </p:nvPr>
-        </p:nvSpPr>
-        <p:spPr>
-          <a:xfrm>
-            <a:off x="685800" y="4344025"/>
-            <a:ext cx="5486400" cy="4114488"/>
-          </a:xfrm>
-          <a:prstGeom prst="rect">
-            <a:avLst/>
-          </a:prstGeom>
-          <a:noFill/>
-          <a:ln>
-            <a:noFill/>
-          </a:ln>
-        </p:spPr>
-        <p:txBody>
-          <a:bodyPr anchorCtr="0" anchor="ctr" bIns="91425" lIns="91425" spcFirstLastPara="1" rIns="91425" wrap="square" tIns="91425">
-            <a:noAutofit/>
-          </a:bodyPr>
-          <a:lstStyle/>
-          <a:p>
-            <a:pPr indent="0" lvl="0" marL="0" rtl="0" algn="l">
-              <a:spcBef>
-                <a:spcPts val="0"/>
-              </a:spcBef>
-              <a:spcAft>
-                <a:spcPts val="0"/>
-              </a:spcAft>
-              <a:buNone/>
-            </a:pPr>
-            <a:r>
-              <a:t/>
-            </a:r>
-            <a:endParaRPr/>
-          </a:p>
-        </p:txBody>
-      </p:sp>
-      <p:sp>
-        <p:nvSpPr>
-          <p:cNvPr id="179" name="Google Shape;179;g29ee01136d_0_219:notes"/>
-          <p:cNvSpPr/>
-          <p:nvPr>
-            <p:ph idx="2" type="sldImg"/>
-          </p:nvPr>
-        </p:nvSpPr>
-        <p:spPr>
-          <a:xfrm>
-            <a:off x="1742607" y="685800"/>
-            <a:ext cx="3372787" cy="3429000"/>
-          </a:xfrm>
-          <a:custGeom>
-            <a:rect b="b" l="l" r="r" t="t"/>
-            <a:pathLst>
-              <a:path extrusionOk="0" h="120000" w="120000">
-                <a:moveTo>
-                  <a:pt x="0" y="0"/>
-                </a:moveTo>
-                <a:lnTo>
-                  <a:pt x="120000" y="0"/>
-                </a:lnTo>
-                <a:lnTo>
-                  <a:pt x="120000" y="120000"/>
-                </a:lnTo>
-                <a:lnTo>
-                  <a:pt x="0" y="120000"/>
-                </a:lnTo>
-                <a:close/>
-              </a:path>
-            </a:pathLst>
-          </a:custGeom>
-        </p:spPr>
-      </p:sp>
-    </p:spTree>
-  </p:cSld>
-  <p:clrMapOvr>
-    <a:masterClrMapping/>
-  </p:clrMapOvr>
-</p:notes>
-</file>
-
-<file path=ppt/notesSlides/notesSlide15.xml><?xml version="1.0" encoding="utf-8"?>
-<p:notes xmlns:a="http://schemas.openxmlformats.org/drawingml/2006/main" xmlns:r="http://schemas.openxmlformats.org/officeDocument/2006/relationships" xmlns:mc="http://schemas.openxmlformats.org/markup-compatibility/2006" xmlns:mv="urn:schemas-microsoft-com:mac:vml" xmlns:p="http://schemas.openxmlformats.org/presentationml/2006/main" xmlns:c="http://schemas.openxmlformats.org/drawingml/2006/chart" xmlns:dgm="http://schemas.openxmlformats.org/drawingml/2006/diagram" xmlns:o="urn:schemas-microsoft-com:office:office" xmlns:v="urn:schemas-microsoft-com:vml" xmlns:pvml="urn:schemas-microsoft-com:office:powerpoint" xmlns:com="http://schemas.openxmlformats.org/drawingml/2006/compatibility" xmlns:p14="http://schemas.microsoft.com/office/powerpoint/2010/main" xmlns:p15="http://schemas.microsoft.com/office/powerpoint/2012/main" showMasterPhAnim="0" showMasterSp="0">
-  <p:cSld>
-    <p:spTree>
-      <p:nvGrpSpPr>
-        <p:cNvPr id="184" name="Shape 184"/>
-        <p:cNvGrpSpPr/>
-        <p:nvPr/>
-      </p:nvGrpSpPr>
-      <p:grpSpPr>
-        <a:xfrm>
-          <a:off x="0" y="0"/>
-          <a:ext cx="0" cy="0"/>
-          <a:chOff x="0" y="0"/>
-          <a:chExt cx="0" cy="0"/>
-        </a:xfrm>
-      </p:grpSpPr>
-      <p:sp>
-        <p:nvSpPr>
-          <p:cNvPr id="185" name="Google Shape;185;g2b6929a708_0_59:notes"/>
+          <p:cNvPr id="184" name="Google Shape;184;g2b6929a708_0_64:notes"/>
           <p:cNvSpPr/>
           <p:nvPr>
             <p:ph idx="2" type="sldImg"/>
@@ -1365,7 +1360,7 @@
       </p:sp>
       <p:sp>
         <p:nvSpPr>
-          <p:cNvPr id="186" name="Google Shape;186;g2b6929a708_0_59:notes"/>
+          <p:cNvPr id="185" name="Google Shape;185;g2b6929a708_0_64:notes"/>
           <p:cNvSpPr txBox="1"/>
           <p:nvPr>
             <p:ph idx="1" type="body"/>
@@ -1415,7 +1410,7 @@
   <p:cSld>
     <p:spTree>
       <p:nvGrpSpPr>
-        <p:cNvPr id="191" name="Shape 191"/>
+        <p:cNvPr id="190" name="Shape 190"/>
         <p:cNvGrpSpPr/>
         <p:nvPr/>
       </p:nvGrpSpPr>
@@ -1429,7 +1424,7 @@
       </p:grpSpPr>
       <p:sp>
         <p:nvSpPr>
-          <p:cNvPr id="192" name="Google Shape;192;g2b6929a708_0_64:notes"/>
+          <p:cNvPr id="191" name="Google Shape;191;g2b6929a708_0_49:notes"/>
           <p:cNvSpPr/>
           <p:nvPr>
             <p:ph idx="2" type="sldImg"/>
@@ -1464,7 +1459,7 @@
       </p:sp>
       <p:sp>
         <p:nvSpPr>
-          <p:cNvPr id="193" name="Google Shape;193;g2b6929a708_0_64:notes"/>
+          <p:cNvPr id="192" name="Google Shape;192;g2b6929a708_0_49:notes"/>
           <p:cNvSpPr txBox="1"/>
           <p:nvPr>
             <p:ph idx="1" type="body"/>
@@ -1528,106 +1523,7 @@
       </p:grpSpPr>
       <p:sp>
         <p:nvSpPr>
-          <p:cNvPr id="199" name="Google Shape;199;g2b6929a708_0_49:notes"/>
-          <p:cNvSpPr/>
-          <p:nvPr>
-            <p:ph idx="2" type="sldImg"/>
-          </p:nvPr>
-        </p:nvSpPr>
-        <p:spPr>
-          <a:xfrm>
-            <a:off x="381300" y="685800"/>
-            <a:ext cx="6096000" cy="3429000"/>
-          </a:xfrm>
-          <a:custGeom>
-            <a:rect b="b" l="l" r="r" t="t"/>
-            <a:pathLst>
-              <a:path extrusionOk="0" h="120000" w="120000">
-                <a:moveTo>
-                  <a:pt x="0" y="0"/>
-                </a:moveTo>
-                <a:lnTo>
-                  <a:pt x="120000" y="0"/>
-                </a:lnTo>
-                <a:lnTo>
-                  <a:pt x="120000" y="120000"/>
-                </a:lnTo>
-                <a:lnTo>
-                  <a:pt x="0" y="120000"/>
-                </a:lnTo>
-                <a:close/>
-              </a:path>
-            </a:pathLst>
-          </a:custGeom>
-        </p:spPr>
-      </p:sp>
-      <p:sp>
-        <p:nvSpPr>
-          <p:cNvPr id="200" name="Google Shape;200;g2b6929a708_0_49:notes"/>
-          <p:cNvSpPr txBox="1"/>
-          <p:nvPr>
-            <p:ph idx="1" type="body"/>
-          </p:nvPr>
-        </p:nvSpPr>
-        <p:spPr>
-          <a:xfrm>
-            <a:off x="685800" y="4343400"/>
-            <a:ext cx="5486400" cy="4114800"/>
-          </a:xfrm>
-          <a:prstGeom prst="rect">
-            <a:avLst/>
-          </a:prstGeom>
-        </p:spPr>
-        <p:txBody>
-          <a:bodyPr anchorCtr="0" anchor="t" bIns="91425" lIns="91425" spcFirstLastPara="1" rIns="91425" wrap="square" tIns="91425">
-            <a:noAutofit/>
-          </a:bodyPr>
-          <a:lstStyle/>
-          <a:p>
-            <a:pPr indent="0" lvl="0" marL="0" rtl="0" algn="l">
-              <a:spcBef>
-                <a:spcPts val="0"/>
-              </a:spcBef>
-              <a:spcAft>
-                <a:spcPts val="0"/>
-              </a:spcAft>
-              <a:buNone/>
-            </a:pPr>
-            <a:r>
-              <a:t/>
-            </a:r>
-            <a:endParaRPr/>
-          </a:p>
-        </p:txBody>
-      </p:sp>
-    </p:spTree>
-  </p:cSld>
-  <p:clrMapOvr>
-    <a:masterClrMapping/>
-  </p:clrMapOvr>
-</p:notes>
-</file>
-
-<file path=ppt/notesSlides/notesSlide18.xml><?xml version="1.0" encoding="utf-8"?>
-<p:notes xmlns:a="http://schemas.openxmlformats.org/drawingml/2006/main" xmlns:r="http://schemas.openxmlformats.org/officeDocument/2006/relationships" xmlns:mc="http://schemas.openxmlformats.org/markup-compatibility/2006" xmlns:mv="urn:schemas-microsoft-com:mac:vml" xmlns:p="http://schemas.openxmlformats.org/presentationml/2006/main" xmlns:c="http://schemas.openxmlformats.org/drawingml/2006/chart" xmlns:dgm="http://schemas.openxmlformats.org/drawingml/2006/diagram" xmlns:o="urn:schemas-microsoft-com:office:office" xmlns:v="urn:schemas-microsoft-com:vml" xmlns:pvml="urn:schemas-microsoft-com:office:powerpoint" xmlns:com="http://schemas.openxmlformats.org/drawingml/2006/compatibility" xmlns:p14="http://schemas.microsoft.com/office/powerpoint/2010/main" xmlns:p15="http://schemas.microsoft.com/office/powerpoint/2012/main" showMasterPhAnim="0" showMasterSp="0">
-  <p:cSld>
-    <p:spTree>
-      <p:nvGrpSpPr>
-        <p:cNvPr id="206" name="Shape 206"/>
-        <p:cNvGrpSpPr/>
-        <p:nvPr/>
-      </p:nvGrpSpPr>
-      <p:grpSpPr>
-        <a:xfrm>
-          <a:off x="0" y="0"/>
-          <a:ext cx="0" cy="0"/>
-          <a:chOff x="0" y="0"/>
-          <a:chExt cx="0" cy="0"/>
-        </a:xfrm>
-      </p:grpSpPr>
-      <p:sp>
-        <p:nvSpPr>
-          <p:cNvPr id="207" name="Google Shape;207;g29ee01136d_0_231:notes"/>
+          <p:cNvPr id="199" name="Google Shape;199;g29ee01136d_0_231:notes"/>
           <p:cNvSpPr txBox="1"/>
           <p:nvPr>
             <p:ph idx="1" type="body"/>
@@ -1670,7 +1566,7 @@
       </p:sp>
       <p:sp>
         <p:nvSpPr>
-          <p:cNvPr id="208" name="Google Shape;208;g29ee01136d_0_231:notes"/>
+          <p:cNvPr id="200" name="Google Shape;200;g29ee01136d_0_231:notes"/>
           <p:cNvSpPr/>
           <p:nvPr>
             <p:ph idx="2" type="sldImg"/>
@@ -2324,7 +2220,50 @@
       </p:grpSpPr>
       <p:sp>
         <p:nvSpPr>
-          <p:cNvPr id="126" name="Google Shape;126;g2b6929a708_0_8:notes"/>
+          <p:cNvPr id="126" name="Google Shape;126;g29ee01136d_0_64:notes"/>
+          <p:cNvSpPr txBox="1"/>
+          <p:nvPr>
+            <p:ph idx="1" type="body"/>
+          </p:nvPr>
+        </p:nvSpPr>
+        <p:spPr>
+          <a:xfrm>
+            <a:off x="685800" y="4344025"/>
+            <a:ext cx="5486400" cy="4114488"/>
+          </a:xfrm>
+          <a:prstGeom prst="rect">
+            <a:avLst/>
+          </a:prstGeom>
+          <a:noFill/>
+          <a:ln>
+            <a:noFill/>
+          </a:ln>
+        </p:spPr>
+        <p:txBody>
+          <a:bodyPr anchorCtr="0" anchor="ctr" bIns="91425" lIns="91425" spcFirstLastPara="1" rIns="91425" wrap="square" tIns="91425">
+            <a:noAutofit/>
+          </a:bodyPr>
+          <a:lstStyle/>
+          <a:p>
+            <a:pPr indent="0" lvl="0" marL="0" rtl="0" algn="l">
+              <a:spcBef>
+                <a:spcPts val="0"/>
+              </a:spcBef>
+              <a:spcAft>
+                <a:spcPts val="0"/>
+              </a:spcAft>
+              <a:buNone/>
+            </a:pPr>
+            <a:r>
+              <a:t/>
+            </a:r>
+            <a:endParaRPr/>
+          </a:p>
+        </p:txBody>
+      </p:sp>
+      <p:sp>
+        <p:nvSpPr>
+          <p:cNvPr id="127" name="Google Shape;127;g29ee01136d_0_64:notes"/>
           <p:cNvSpPr/>
           <p:nvPr>
             <p:ph idx="2" type="sldImg"/>
@@ -2333,7 +2272,7 @@
         <p:spPr>
           <a:xfrm>
             <a:off x="1742607" y="685800"/>
-            <a:ext cx="3372900" cy="3429000"/>
+            <a:ext cx="3372787" cy="3429000"/>
           </a:xfrm>
           <a:custGeom>
             <a:rect b="b" l="l" r="r" t="t"/>
@@ -2355,128 +2294,7 @@
               </a:path>
             </a:pathLst>
           </a:custGeom>
-          <a:noFill/>
-          <a:ln cap="flat" cmpd="sng" w="9525">
-            <a:solidFill>
-              <a:srgbClr val="000000"/>
-            </a:solidFill>
-            <a:prstDash val="solid"/>
-            <a:miter lim="800000"/>
-            <a:headEnd len="sm" w="sm" type="none"/>
-            <a:tailEnd len="sm" w="sm" type="none"/>
-          </a:ln>
         </p:spPr>
-      </p:sp>
-      <p:sp>
-        <p:nvSpPr>
-          <p:cNvPr id="127" name="Google Shape;127;g2b6929a708_0_8:notes"/>
-          <p:cNvSpPr txBox="1"/>
-          <p:nvPr>
-            <p:ph idx="1" type="body"/>
-          </p:nvPr>
-        </p:nvSpPr>
-        <p:spPr>
-          <a:xfrm>
-            <a:off x="685800" y="4344025"/>
-            <a:ext cx="5486400" cy="4114500"/>
-          </a:xfrm>
-          <a:prstGeom prst="rect">
-            <a:avLst/>
-          </a:prstGeom>
-          <a:noFill/>
-          <a:ln>
-            <a:noFill/>
-          </a:ln>
-        </p:spPr>
-        <p:txBody>
-          <a:bodyPr anchorCtr="0" anchor="t" bIns="45700" lIns="91425" spcFirstLastPara="1" rIns="91425" wrap="square" tIns="45700">
-            <a:noAutofit/>
-          </a:bodyPr>
-          <a:lstStyle/>
-          <a:p>
-            <a:pPr indent="0" lvl="0" marL="0" marR="0" rtl="0" algn="l">
-              <a:spcBef>
-                <a:spcPts val="0"/>
-              </a:spcBef>
-              <a:spcAft>
-                <a:spcPts val="0"/>
-              </a:spcAft>
-              <a:buNone/>
-            </a:pPr>
-            <a:r>
-              <a:t/>
-            </a:r>
-            <a:endParaRPr b="0" i="0" sz="1200" u="none" cap="none" strike="noStrike">
-              <a:solidFill>
-                <a:schemeClr val="dk1"/>
-              </a:solidFill>
-              <a:latin typeface="Arial"/>
-              <a:ea typeface="Arial"/>
-              <a:cs typeface="Arial"/>
-              <a:sym typeface="Arial"/>
-            </a:endParaRPr>
-          </a:p>
-        </p:txBody>
-      </p:sp>
-      <p:sp>
-        <p:nvSpPr>
-          <p:cNvPr id="128" name="Google Shape;128;g2b6929a708_0_8:notes"/>
-          <p:cNvSpPr txBox="1"/>
-          <p:nvPr>
-            <p:ph idx="12" type="sldNum"/>
-          </p:nvPr>
-        </p:nvSpPr>
-        <p:spPr>
-          <a:xfrm>
-            <a:off x="3884613" y="8684926"/>
-            <a:ext cx="2971800" cy="457500"/>
-          </a:xfrm>
-          <a:prstGeom prst="rect">
-            <a:avLst/>
-          </a:prstGeom>
-          <a:noFill/>
-          <a:ln>
-            <a:noFill/>
-          </a:ln>
-        </p:spPr>
-        <p:txBody>
-          <a:bodyPr anchorCtr="0" anchor="b" bIns="45700" lIns="91425" spcFirstLastPara="1" rIns="91425" wrap="square" tIns="45700">
-            <a:noAutofit/>
-          </a:bodyPr>
-          <a:lstStyle/>
-          <a:p>
-            <a:pPr indent="0" lvl="0" marL="0" marR="0" rtl="0" algn="r">
-              <a:spcBef>
-                <a:spcPts val="0"/>
-              </a:spcBef>
-              <a:spcAft>
-                <a:spcPts val="0"/>
-              </a:spcAft>
-              <a:buNone/>
-            </a:pPr>
-            <a:fld id="{00000000-1234-1234-1234-123412341234}" type="slidenum">
-              <a:rPr lang="pt-BR" sz="1200">
-                <a:solidFill>
-                  <a:schemeClr val="dk1"/>
-                </a:solidFill>
-                <a:latin typeface="Arial"/>
-                <a:ea typeface="Arial"/>
-                <a:cs typeface="Arial"/>
-                <a:sym typeface="Arial"/>
-              </a:rPr>
-              <a:t>‹#›</a:t>
-            </a:fld>
-            <a:endParaRPr sz="1200">
-              <a:solidFill>
-                <a:schemeClr val="dk1"/>
-              </a:solidFill>
-              <a:latin typeface="Arial"/>
-              <a:ea typeface="Arial"/>
-              <a:cs typeface="Arial"/>
-              <a:sym typeface="Arial"/>
-            </a:endParaRPr>
-          </a:p>
-        </p:txBody>
       </p:sp>
     </p:spTree>
   </p:cSld>
@@ -2505,7 +2323,7 @@
       </p:grpSpPr>
       <p:sp>
         <p:nvSpPr>
-          <p:cNvPr id="134" name="Google Shape;134;g29ee01136d_0_64:notes"/>
+          <p:cNvPr id="134" name="Google Shape;134;g4fdfc557cb_0_1:notes"/>
           <p:cNvSpPr txBox="1"/>
           <p:nvPr>
             <p:ph idx="1" type="body"/>
@@ -2514,7 +2332,7 @@
         <p:spPr>
           <a:xfrm>
             <a:off x="685800" y="4344025"/>
-            <a:ext cx="5486400" cy="4114488"/>
+            <a:ext cx="5486400" cy="4114500"/>
           </a:xfrm>
           <a:prstGeom prst="rect">
             <a:avLst/>
@@ -2548,7 +2366,7 @@
       </p:sp>
       <p:sp>
         <p:nvSpPr>
-          <p:cNvPr id="135" name="Google Shape;135;g29ee01136d_0_64:notes"/>
+          <p:cNvPr id="135" name="Google Shape;135;g4fdfc557cb_0_1:notes"/>
           <p:cNvSpPr/>
           <p:nvPr>
             <p:ph idx="2" type="sldImg"/>
@@ -2557,7 +2375,7 @@
         <p:spPr>
           <a:xfrm>
             <a:off x="1742607" y="685800"/>
-            <a:ext cx="3372787" cy="3429000"/>
+            <a:ext cx="3372900" cy="3429000"/>
           </a:xfrm>
           <a:custGeom>
             <a:rect b="b" l="l" r="r" t="t"/>
@@ -14374,7 +14192,7 @@
   <p:cSld>
     <p:spTree>
       <p:nvGrpSpPr>
-        <p:cNvPr id="144" name="Shape 144"/>
+        <p:cNvPr id="143" name="Shape 143"/>
         <p:cNvGrpSpPr/>
         <p:nvPr/>
       </p:nvGrpSpPr>
@@ -14388,7 +14206,7 @@
       </p:grpSpPr>
       <p:sp>
         <p:nvSpPr>
-          <p:cNvPr id="145" name="Google Shape;145;p23"/>
+          <p:cNvPr id="144" name="Google Shape;144;p23"/>
           <p:cNvSpPr txBox="1"/>
           <p:nvPr>
             <p:ph type="title"/>
@@ -14423,15 +14241,19 @@
               <a:spcAft>
                 <a:spcPts val="0"/>
               </a:spcAft>
-              <a:buClr>
-                <a:srgbClr val="000000"/>
-              </a:buClr>
-              <a:buFont typeface="Arial"/>
               <a:buNone/>
             </a:pPr>
             <a:r>
-              <a:rPr lang="pt-BR"/>
-              <a:t>Existing Models</a:t>
+              <a:rPr b="1" i="0" lang="pt-BR" sz="2800" u="none" cap="none" strike="noStrike">
+                <a:solidFill>
+                  <a:schemeClr val="dk2"/>
+                </a:solidFill>
+                <a:latin typeface="Calibri"/>
+                <a:ea typeface="Calibri"/>
+                <a:cs typeface="Calibri"/>
+                <a:sym typeface="Calibri"/>
+              </a:rPr>
+              <a:t>Scope of work</a:t>
             </a:r>
             <a:endParaRPr b="1" i="0" sz="2800" u="none" cap="none" strike="noStrike">
               <a:solidFill>
@@ -14447,7 +14269,7 @@
       </p:sp>
       <p:sp>
         <p:nvSpPr>
-          <p:cNvPr id="146" name="Google Shape;146;p23"/>
+          <p:cNvPr id="145" name="Google Shape;145;p23"/>
           <p:cNvSpPr txBox="1"/>
           <p:nvPr>
             <p:ph idx="1" type="body"/>
@@ -14455,8 +14277,8 @@
         </p:nvSpPr>
         <p:spPr>
           <a:xfrm>
-            <a:off x="1143000" y="1085850"/>
-            <a:ext cx="7696200" cy="3657600"/>
+            <a:off x="762000" y="1085850"/>
+            <a:ext cx="4114800" cy="3657600"/>
           </a:xfrm>
           <a:prstGeom prst="rect">
             <a:avLst/>
@@ -14472,7 +14294,7 @@
           </a:bodyPr>
           <a:lstStyle/>
           <a:p>
-            <a:pPr indent="-225425" lvl="0" marL="231775" marR="0" rtl="0" algn="l">
+            <a:pPr indent="-219075" lvl="0" marL="231775" marR="0" rtl="0" algn="l">
               <a:spcBef>
                 <a:spcPts val="0"/>
               </a:spcBef>
@@ -14482,12 +14304,12 @@
               <a:buClr>
                 <a:schemeClr val="dk1"/>
               </a:buClr>
-              <a:buSzPts val="1900"/>
+              <a:buSzPts val="2200"/>
               <a:buFont typeface="Noto Sans Symbols"/>
               <a:buChar char="▪"/>
             </a:pPr>
             <a:r>
-              <a:rPr b="0" i="0" lang="pt-BR" sz="1900" u="none" cap="none" strike="noStrike">
+              <a:rPr b="0" i="0" lang="pt-BR" sz="2200" u="none" cap="none" strike="noStrike">
                 <a:solidFill>
                   <a:schemeClr val="dk1"/>
                 </a:solidFill>
@@ -14496,14 +14318,14 @@
                 <a:cs typeface="Calibri"/>
                 <a:sym typeface="Calibri"/>
               </a:rPr>
-              <a:t>Random Walk (2D):</a:t>
+              <a:t>New classes added to the mobility module</a:t>
             </a:r>
-            <a:endParaRPr sz="1900"/>
+            <a:endParaRPr sz="2200"/>
           </a:p>
           <a:p>
-            <a:pPr indent="-279400" lvl="1" marL="742950" marR="0" rtl="0" algn="l">
-              <a:spcBef>
-                <a:spcPts val="400"/>
+            <a:pPr indent="-79375" lvl="0" marL="231775" marR="0" rtl="0" algn="l">
+              <a:spcBef>
+                <a:spcPts val="480"/>
               </a:spcBef>
               <a:spcAft>
                 <a:spcPts val="0"/>
@@ -14511,242 +14333,14 @@
               <a:buClr>
                 <a:schemeClr val="dk1"/>
               </a:buClr>
-              <a:buSzPts val="1900"/>
-              <a:buFont typeface="Merriweather Sans"/>
-              <a:buChar char="−"/>
+              <a:buSzPts val="2400"/>
+              <a:buFont typeface="Noto Sans Symbols"/>
+              <a:buNone/>
             </a:pPr>
             <a:r>
-              <a:rPr lang="pt-BR" sz="1900"/>
-              <a:t>M</a:t>
+              <a:t/>
             </a:r>
-            <a:r>
-              <a:rPr b="0" i="0" lang="pt-BR" sz="1900" u="none" cap="none" strike="noStrike">
-                <a:solidFill>
-                  <a:schemeClr val="dk1"/>
-                </a:solidFill>
-                <a:latin typeface="Calibri"/>
-                <a:ea typeface="Calibri"/>
-                <a:cs typeface="Calibri"/>
-                <a:sym typeface="Calibri"/>
-              </a:rPr>
-              <a:t>ove in a straight line for a determined amount of time.</a:t>
-            </a:r>
-            <a:endParaRPr sz="1900"/>
-          </a:p>
-          <a:p>
-            <a:pPr indent="-279400" lvl="1" marL="742950" marR="0" rtl="0" algn="l">
-              <a:spcBef>
-                <a:spcPts val="400"/>
-              </a:spcBef>
-              <a:spcAft>
-                <a:spcPts val="0"/>
-              </a:spcAft>
-              <a:buClr>
-                <a:schemeClr val="dk1"/>
-              </a:buClr>
-              <a:buSzPts val="1900"/>
-              <a:buFont typeface="Merriweather Sans"/>
-              <a:buChar char="−"/>
-            </a:pPr>
-            <a:r>
-              <a:rPr b="0" i="0" lang="pt-BR" sz="1900" u="none" cap="none" strike="noStrike">
-                <a:solidFill>
-                  <a:schemeClr val="dk1"/>
-                </a:solidFill>
-                <a:latin typeface="Calibri"/>
-                <a:ea typeface="Calibri"/>
-                <a:cs typeface="Calibri"/>
-                <a:sym typeface="Calibri"/>
-              </a:rPr>
-              <a:t>Randomly choose new parameters.</a:t>
-            </a:r>
-            <a:endParaRPr sz="1900"/>
-          </a:p>
-          <a:p>
-            <a:pPr indent="-225425" lvl="0" marL="231775" marR="0" rtl="0" algn="l">
-              <a:spcBef>
-                <a:spcPts val="400"/>
-              </a:spcBef>
-              <a:spcAft>
-                <a:spcPts val="0"/>
-              </a:spcAft>
-              <a:buClr>
-                <a:schemeClr val="dk1"/>
-              </a:buClr>
-              <a:buSzPts val="1900"/>
-              <a:buFont typeface="Noto Sans Symbols"/>
-              <a:buChar char="▪"/>
-            </a:pPr>
-            <a:r>
-              <a:rPr b="0" i="0" lang="pt-BR" sz="1900" u="none" cap="none" strike="noStrike">
-                <a:solidFill>
-                  <a:schemeClr val="dk1"/>
-                </a:solidFill>
-                <a:latin typeface="Calibri"/>
-                <a:ea typeface="Calibri"/>
-                <a:cs typeface="Calibri"/>
-                <a:sym typeface="Calibri"/>
-              </a:rPr>
-              <a:t>Random Direction (2D):</a:t>
-            </a:r>
-            <a:endParaRPr sz="1900"/>
-          </a:p>
-          <a:p>
-            <a:pPr indent="-279400" lvl="1" marL="742950" marR="0" rtl="0" algn="l">
-              <a:spcBef>
-                <a:spcPts val="400"/>
-              </a:spcBef>
-              <a:spcAft>
-                <a:spcPts val="0"/>
-              </a:spcAft>
-              <a:buClr>
-                <a:schemeClr val="dk1"/>
-              </a:buClr>
-              <a:buSzPts val="1900"/>
-              <a:buFont typeface="Merriweather Sans"/>
-              <a:buChar char="−"/>
-            </a:pPr>
-            <a:r>
-              <a:rPr b="0" i="0" lang="pt-BR" sz="1900" u="none" cap="none" strike="noStrike">
-                <a:solidFill>
-                  <a:schemeClr val="dk1"/>
-                </a:solidFill>
-                <a:latin typeface="Calibri"/>
-                <a:ea typeface="Calibri"/>
-                <a:cs typeface="Calibri"/>
-                <a:sym typeface="Calibri"/>
-              </a:rPr>
-              <a:t>A node moves in straight line until it reaches the boundary.</a:t>
-            </a:r>
-            <a:endParaRPr sz="1900"/>
-          </a:p>
-          <a:p>
-            <a:pPr indent="-279400" lvl="1" marL="742950" marR="0" rtl="0" algn="l">
-              <a:spcBef>
-                <a:spcPts val="400"/>
-              </a:spcBef>
-              <a:spcAft>
-                <a:spcPts val="0"/>
-              </a:spcAft>
-              <a:buClr>
-                <a:schemeClr val="dk1"/>
-              </a:buClr>
-              <a:buSzPts val="1900"/>
-              <a:buFont typeface="Merriweather Sans"/>
-              <a:buChar char="−"/>
-            </a:pPr>
-            <a:r>
-              <a:rPr b="0" i="0" lang="pt-BR" sz="1900" u="none" cap="none" strike="noStrike">
-                <a:solidFill>
-                  <a:schemeClr val="dk1"/>
-                </a:solidFill>
-                <a:latin typeface="Calibri"/>
-                <a:ea typeface="Calibri"/>
-                <a:cs typeface="Calibri"/>
-                <a:sym typeface="Calibri"/>
-              </a:rPr>
-              <a:t>Randomly chooses new parameters</a:t>
-            </a:r>
-            <a:r>
-              <a:rPr lang="pt-BR" sz="1900"/>
-              <a:t>.</a:t>
-            </a:r>
-            <a:endParaRPr sz="1900"/>
-          </a:p>
-          <a:p>
-            <a:pPr indent="-225425" lvl="0" marL="231775" marR="0" rtl="0" algn="l">
-              <a:spcBef>
-                <a:spcPts val="400"/>
-              </a:spcBef>
-              <a:spcAft>
-                <a:spcPts val="0"/>
-              </a:spcAft>
-              <a:buClr>
-                <a:schemeClr val="dk1"/>
-              </a:buClr>
-              <a:buSzPts val="1900"/>
-              <a:buFont typeface="Noto Sans Symbols"/>
-              <a:buChar char="▪"/>
-            </a:pPr>
-            <a:r>
-              <a:rPr b="0" i="0" lang="pt-BR" sz="1900" u="none" cap="none" strike="noStrike">
-                <a:solidFill>
-                  <a:schemeClr val="dk1"/>
-                </a:solidFill>
-                <a:latin typeface="Calibri"/>
-                <a:ea typeface="Calibri"/>
-                <a:cs typeface="Calibri"/>
-                <a:sym typeface="Calibri"/>
-              </a:rPr>
-              <a:t>Gauss-Markov (3D):</a:t>
-            </a:r>
-            <a:endParaRPr sz="1900"/>
-          </a:p>
-          <a:p>
-            <a:pPr indent="-279400" lvl="1" marL="742950" marR="0" rtl="0" algn="l">
-              <a:spcBef>
-                <a:spcPts val="400"/>
-              </a:spcBef>
-              <a:spcAft>
-                <a:spcPts val="0"/>
-              </a:spcAft>
-              <a:buClr>
-                <a:schemeClr val="dk1"/>
-              </a:buClr>
-              <a:buSzPts val="1900"/>
-              <a:buFont typeface="Merriweather Sans"/>
-              <a:buChar char="−"/>
-            </a:pPr>
-            <a:r>
-              <a:rPr lang="pt-BR" sz="1900"/>
-              <a:t>M</a:t>
-            </a:r>
-            <a:r>
-              <a:rPr b="0" i="0" lang="pt-BR" sz="1900" u="none" cap="none" strike="noStrike">
-                <a:solidFill>
-                  <a:schemeClr val="dk1"/>
-                </a:solidFill>
-                <a:latin typeface="Calibri"/>
-                <a:ea typeface="Calibri"/>
-                <a:cs typeface="Calibri"/>
-                <a:sym typeface="Calibri"/>
-              </a:rPr>
-              <a:t>oves for a certain time before changing parameters.</a:t>
-            </a:r>
-            <a:endParaRPr sz="1900"/>
-          </a:p>
-          <a:p>
-            <a:pPr indent="-279400" lvl="1" marL="742950" marR="0" rtl="0" algn="l">
-              <a:spcBef>
-                <a:spcPts val="400"/>
-              </a:spcBef>
-              <a:spcAft>
-                <a:spcPts val="0"/>
-              </a:spcAft>
-              <a:buClr>
-                <a:schemeClr val="dk1"/>
-              </a:buClr>
-              <a:buSzPts val="1900"/>
-              <a:buFont typeface="Merriweather Sans"/>
-              <a:buChar char="−"/>
-            </a:pPr>
-            <a:r>
-              <a:rPr b="0" i="0" lang="pt-BR" sz="1900" u="none" cap="none" strike="noStrike">
-                <a:solidFill>
-                  <a:schemeClr val="dk1"/>
-                </a:solidFill>
-                <a:latin typeface="Calibri"/>
-                <a:ea typeface="Calibri"/>
-                <a:cs typeface="Calibri"/>
-                <a:sym typeface="Calibri"/>
-              </a:rPr>
-              <a:t>Parameters can be constrained by random distributed variables</a:t>
-            </a:r>
-            <a:r>
-              <a:rPr lang="pt-BR" sz="1900"/>
-              <a:t>.</a:t>
-            </a:r>
-            <a:endParaRPr b="0" i="0" sz="1900" u="none" cap="none" strike="noStrike">
+            <a:endParaRPr b="0" i="0" sz="2200" u="none" cap="none" strike="noStrike">
               <a:solidFill>
                 <a:schemeClr val="dk1"/>
               </a:solidFill>
@@ -14756,8 +14350,122 @@
               <a:sym typeface="Calibri"/>
             </a:endParaRPr>
           </a:p>
+          <a:p>
+            <a:pPr indent="-219075" lvl="0" marL="231775" marR="0" rtl="0" algn="l">
+              <a:spcBef>
+                <a:spcPts val="480"/>
+              </a:spcBef>
+              <a:spcAft>
+                <a:spcPts val="0"/>
+              </a:spcAft>
+              <a:buClr>
+                <a:schemeClr val="dk1"/>
+              </a:buClr>
+              <a:buSzPts val="2200"/>
+              <a:buFont typeface="Noto Sans Symbols"/>
+              <a:buChar char="▪"/>
+            </a:pPr>
+            <a:r>
+              <a:rPr b="0" i="0" lang="pt-BR" sz="2200" u="none" cap="none" strike="noStrike">
+                <a:solidFill>
+                  <a:schemeClr val="dk1"/>
+                </a:solidFill>
+                <a:latin typeface="Calibri"/>
+                <a:ea typeface="Calibri"/>
+                <a:cs typeface="Calibri"/>
+                <a:sym typeface="Calibri"/>
+              </a:rPr>
+              <a:t>Modification of existing auxiliary classes</a:t>
+            </a:r>
+            <a:endParaRPr sz="2200"/>
+          </a:p>
+          <a:p>
+            <a:pPr indent="-273050" lvl="1" marL="742950" marR="0" rtl="0" algn="l">
+              <a:spcBef>
+                <a:spcPts val="480"/>
+              </a:spcBef>
+              <a:spcAft>
+                <a:spcPts val="0"/>
+              </a:spcAft>
+              <a:buClr>
+                <a:schemeClr val="dk1"/>
+              </a:buClr>
+              <a:buSzPts val="2200"/>
+              <a:buFont typeface="Merriweather Sans"/>
+              <a:buChar char="−"/>
+            </a:pPr>
+            <a:r>
+              <a:rPr b="0" i="0" lang="pt-BR" sz="2200" u="none" cap="none" strike="noStrike">
+                <a:solidFill>
+                  <a:schemeClr val="dk1"/>
+                </a:solidFill>
+                <a:latin typeface="Calibri"/>
+                <a:ea typeface="Calibri"/>
+                <a:cs typeface="Calibri"/>
+                <a:sym typeface="Calibri"/>
+              </a:rPr>
+              <a:t>No functions were removed/modified</a:t>
+            </a:r>
+            <a:endParaRPr sz="2200"/>
+          </a:p>
+          <a:p>
+            <a:pPr indent="-273050" lvl="1" marL="742950" marR="0" rtl="0" algn="l">
+              <a:spcBef>
+                <a:spcPts val="480"/>
+              </a:spcBef>
+              <a:spcAft>
+                <a:spcPts val="0"/>
+              </a:spcAft>
+              <a:buClr>
+                <a:schemeClr val="dk1"/>
+              </a:buClr>
+              <a:buSzPts val="2200"/>
+              <a:buFont typeface="Merriweather Sans"/>
+              <a:buChar char="−"/>
+            </a:pPr>
+            <a:r>
+              <a:rPr b="0" i="0" lang="pt-BR" sz="2200" u="none" cap="none" strike="noStrike">
+                <a:solidFill>
+                  <a:schemeClr val="dk1"/>
+                </a:solidFill>
+                <a:latin typeface="Calibri"/>
+                <a:ea typeface="Calibri"/>
+                <a:cs typeface="Calibri"/>
+                <a:sym typeface="Calibri"/>
+              </a:rPr>
+              <a:t>Only new methods added to account for 3D geometry</a:t>
+            </a:r>
+            <a:endParaRPr sz="2200"/>
+          </a:p>
         </p:txBody>
       </p:sp>
+      <p:pic>
+        <p:nvPicPr>
+          <p:cNvPr id="146" name="Google Shape;146;p23"/>
+          <p:cNvPicPr preferRelativeResize="0"/>
+          <p:nvPr/>
+        </p:nvPicPr>
+        <p:blipFill rotWithShape="1">
+          <a:blip r:embed="rId3">
+            <a:alphaModFix/>
+          </a:blip>
+          <a:srcRect b="0" l="0" r="0" t="0"/>
+          <a:stretch/>
+        </p:blipFill>
+        <p:spPr>
+          <a:xfrm>
+            <a:off x="4921897" y="1021550"/>
+            <a:ext cx="3917301" cy="2628900"/>
+          </a:xfrm>
+          <a:prstGeom prst="rect">
+            <a:avLst/>
+          </a:prstGeom>
+          <a:noFill/>
+          <a:ln>
+            <a:noFill/>
+          </a:ln>
+        </p:spPr>
+      </p:pic>
       <p:sp>
         <p:nvSpPr>
           <p:cNvPr id="147" name="Google Shape;147;p23"/>
@@ -14811,477 +14519,6 @@
   <p:clrMapOvr>
     <a:masterClrMapping/>
   </p:clrMapOvr>
-  <p:timing>
-    <p:tnLst>
-      <p:par>
-        <p:cTn dur="indefinite" nodeType="tmRoot" restart="never">
-          <p:childTnLst>
-            <p:seq concurrent="1" nextAc="seek">
-              <p:cTn dur="indefinite" id="2" nodeType="mainSeq">
-                <p:childTnLst>
-                  <p:par>
-                    <p:cTn fill="hold">
-                      <p:stCondLst>
-                        <p:cond delay="indefinite"/>
-                      </p:stCondLst>
-                      <p:childTnLst>
-                        <p:par>
-                          <p:cTn fill="hold">
-                            <p:stCondLst>
-                              <p:cond delay="0"/>
-                            </p:stCondLst>
-                            <p:childTnLst>
-                              <p:par>
-                                <p:cTn fill="hold" nodeType="clickEffect" presetClass="entr" presetID="1" presetSubtype="0">
-                                  <p:stCondLst>
-                                    <p:cond delay="0"/>
-                                  </p:stCondLst>
-                                  <p:childTnLst>
-                                    <p:set>
-                                      <p:cBhvr>
-                                        <p:cTn dur="1" fill="hold">
-                                          <p:stCondLst>
-                                            <p:cond delay="0"/>
-                                          </p:stCondLst>
-                                        </p:cTn>
-                                        <p:tgtEl>
-                                          <p:spTgt spid="146">
-                                            <p:txEl>
-                                              <p:pRg end="0" st="0"/>
-                                            </p:txEl>
-                                          </p:spTgt>
-                                        </p:tgtEl>
-                                        <p:attrNameLst>
-                                          <p:attrName>style.visibility</p:attrName>
-                                        </p:attrNameLst>
-                                      </p:cBhvr>
-                                      <p:to>
-                                        <p:strVal val="visible"/>
-                                      </p:to>
-                                    </p:set>
-                                  </p:childTnLst>
-                                </p:cTn>
-                              </p:par>
-                            </p:childTnLst>
-                          </p:cTn>
-                        </p:par>
-                      </p:childTnLst>
-                    </p:cTn>
-                  </p:par>
-                  <p:par>
-                    <p:cTn fill="hold">
-                      <p:stCondLst>
-                        <p:cond delay="indefinite"/>
-                      </p:stCondLst>
-                      <p:childTnLst>
-                        <p:par>
-                          <p:cTn fill="hold">
-                            <p:stCondLst>
-                              <p:cond delay="0"/>
-                            </p:stCondLst>
-                            <p:childTnLst>
-                              <p:par>
-                                <p:cTn fill="hold" nodeType="clickEffect" presetClass="entr" presetID="1" presetSubtype="0">
-                                  <p:stCondLst>
-                                    <p:cond delay="0"/>
-                                  </p:stCondLst>
-                                  <p:childTnLst>
-                                    <p:set>
-                                      <p:cBhvr>
-                                        <p:cTn dur="1" fill="hold">
-                                          <p:stCondLst>
-                                            <p:cond delay="0"/>
-                                          </p:stCondLst>
-                                        </p:cTn>
-                                        <p:tgtEl>
-                                          <p:spTgt spid="146">
-                                            <p:txEl>
-                                              <p:pRg end="1" st="1"/>
-                                            </p:txEl>
-                                          </p:spTgt>
-                                        </p:tgtEl>
-                                        <p:attrNameLst>
-                                          <p:attrName>style.visibility</p:attrName>
-                                        </p:attrNameLst>
-                                      </p:cBhvr>
-                                      <p:to>
-                                        <p:strVal val="visible"/>
-                                      </p:to>
-                                    </p:set>
-                                  </p:childTnLst>
-                                </p:cTn>
-                              </p:par>
-                            </p:childTnLst>
-                          </p:cTn>
-                        </p:par>
-                      </p:childTnLst>
-                    </p:cTn>
-                  </p:par>
-                  <p:par>
-                    <p:cTn fill="hold">
-                      <p:stCondLst>
-                        <p:cond delay="indefinite"/>
-                      </p:stCondLst>
-                      <p:childTnLst>
-                        <p:par>
-                          <p:cTn fill="hold">
-                            <p:stCondLst>
-                              <p:cond delay="0"/>
-                            </p:stCondLst>
-                            <p:childTnLst>
-                              <p:par>
-                                <p:cTn fill="hold" nodeType="clickEffect" presetClass="entr" presetID="1" presetSubtype="0">
-                                  <p:stCondLst>
-                                    <p:cond delay="0"/>
-                                  </p:stCondLst>
-                                  <p:childTnLst>
-                                    <p:set>
-                                      <p:cBhvr>
-                                        <p:cTn dur="1" fill="hold">
-                                          <p:stCondLst>
-                                            <p:cond delay="0"/>
-                                          </p:stCondLst>
-                                        </p:cTn>
-                                        <p:tgtEl>
-                                          <p:spTgt spid="146">
-                                            <p:txEl>
-                                              <p:pRg end="2" st="2"/>
-                                            </p:txEl>
-                                          </p:spTgt>
-                                        </p:tgtEl>
-                                        <p:attrNameLst>
-                                          <p:attrName>style.visibility</p:attrName>
-                                        </p:attrNameLst>
-                                      </p:cBhvr>
-                                      <p:to>
-                                        <p:strVal val="visible"/>
-                                      </p:to>
-                                    </p:set>
-                                  </p:childTnLst>
-                                </p:cTn>
-                              </p:par>
-                            </p:childTnLst>
-                          </p:cTn>
-                        </p:par>
-                      </p:childTnLst>
-                    </p:cTn>
-                  </p:par>
-                  <p:par>
-                    <p:cTn fill="hold">
-                      <p:stCondLst>
-                        <p:cond delay="indefinite"/>
-                      </p:stCondLst>
-                      <p:childTnLst>
-                        <p:par>
-                          <p:cTn fill="hold">
-                            <p:stCondLst>
-                              <p:cond delay="0"/>
-                            </p:stCondLst>
-                            <p:childTnLst>
-                              <p:par>
-                                <p:cTn fill="hold" nodeType="clickEffect" presetClass="entr" presetID="1" presetSubtype="0">
-                                  <p:stCondLst>
-                                    <p:cond delay="0"/>
-                                  </p:stCondLst>
-                                  <p:childTnLst>
-                                    <p:set>
-                                      <p:cBhvr>
-                                        <p:cTn dur="1" fill="hold">
-                                          <p:stCondLst>
-                                            <p:cond delay="0"/>
-                                          </p:stCondLst>
-                                        </p:cTn>
-                                        <p:tgtEl>
-                                          <p:spTgt spid="146">
-                                            <p:txEl>
-                                              <p:pRg end="3" st="3"/>
-                                            </p:txEl>
-                                          </p:spTgt>
-                                        </p:tgtEl>
-                                        <p:attrNameLst>
-                                          <p:attrName>style.visibility</p:attrName>
-                                        </p:attrNameLst>
-                                      </p:cBhvr>
-                                      <p:to>
-                                        <p:strVal val="visible"/>
-                                      </p:to>
-                                    </p:set>
-                                  </p:childTnLst>
-                                </p:cTn>
-                              </p:par>
-                            </p:childTnLst>
-                          </p:cTn>
-                        </p:par>
-                      </p:childTnLst>
-                    </p:cTn>
-                  </p:par>
-                  <p:par>
-                    <p:cTn fill="hold">
-                      <p:stCondLst>
-                        <p:cond delay="indefinite"/>
-                      </p:stCondLst>
-                      <p:childTnLst>
-                        <p:par>
-                          <p:cTn fill="hold">
-                            <p:stCondLst>
-                              <p:cond delay="0"/>
-                            </p:stCondLst>
-                            <p:childTnLst>
-                              <p:par>
-                                <p:cTn fill="hold" nodeType="clickEffect" presetClass="entr" presetID="1" presetSubtype="0">
-                                  <p:stCondLst>
-                                    <p:cond delay="0"/>
-                                  </p:stCondLst>
-                                  <p:childTnLst>
-                                    <p:set>
-                                      <p:cBhvr>
-                                        <p:cTn dur="1" fill="hold">
-                                          <p:stCondLst>
-                                            <p:cond delay="0"/>
-                                          </p:stCondLst>
-                                        </p:cTn>
-                                        <p:tgtEl>
-                                          <p:spTgt spid="146">
-                                            <p:txEl>
-                                              <p:pRg end="4" st="4"/>
-                                            </p:txEl>
-                                          </p:spTgt>
-                                        </p:tgtEl>
-                                        <p:attrNameLst>
-                                          <p:attrName>style.visibility</p:attrName>
-                                        </p:attrNameLst>
-                                      </p:cBhvr>
-                                      <p:to>
-                                        <p:strVal val="visible"/>
-                                      </p:to>
-                                    </p:set>
-                                  </p:childTnLst>
-                                </p:cTn>
-                              </p:par>
-                            </p:childTnLst>
-                          </p:cTn>
-                        </p:par>
-                      </p:childTnLst>
-                    </p:cTn>
-                  </p:par>
-                  <p:par>
-                    <p:cTn fill="hold">
-                      <p:stCondLst>
-                        <p:cond delay="indefinite"/>
-                      </p:stCondLst>
-                      <p:childTnLst>
-                        <p:par>
-                          <p:cTn fill="hold">
-                            <p:stCondLst>
-                              <p:cond delay="0"/>
-                            </p:stCondLst>
-                            <p:childTnLst>
-                              <p:par>
-                                <p:cTn fill="hold" nodeType="clickEffect" presetClass="entr" presetID="1" presetSubtype="0">
-                                  <p:stCondLst>
-                                    <p:cond delay="0"/>
-                                  </p:stCondLst>
-                                  <p:childTnLst>
-                                    <p:set>
-                                      <p:cBhvr>
-                                        <p:cTn dur="1" fill="hold">
-                                          <p:stCondLst>
-                                            <p:cond delay="0"/>
-                                          </p:stCondLst>
-                                        </p:cTn>
-                                        <p:tgtEl>
-                                          <p:spTgt spid="146">
-                                            <p:txEl>
-                                              <p:pRg end="5" st="5"/>
-                                            </p:txEl>
-                                          </p:spTgt>
-                                        </p:tgtEl>
-                                        <p:attrNameLst>
-                                          <p:attrName>style.visibility</p:attrName>
-                                        </p:attrNameLst>
-                                      </p:cBhvr>
-                                      <p:to>
-                                        <p:strVal val="visible"/>
-                                      </p:to>
-                                    </p:set>
-                                  </p:childTnLst>
-                                </p:cTn>
-                              </p:par>
-                            </p:childTnLst>
-                          </p:cTn>
-                        </p:par>
-                      </p:childTnLst>
-                    </p:cTn>
-                  </p:par>
-                  <p:par>
-                    <p:cTn fill="hold">
-                      <p:stCondLst>
-                        <p:cond delay="indefinite"/>
-                      </p:stCondLst>
-                      <p:childTnLst>
-                        <p:par>
-                          <p:cTn fill="hold">
-                            <p:stCondLst>
-                              <p:cond delay="0"/>
-                            </p:stCondLst>
-                            <p:childTnLst>
-                              <p:par>
-                                <p:cTn fill="hold" nodeType="clickEffect" presetClass="entr" presetID="1" presetSubtype="0">
-                                  <p:stCondLst>
-                                    <p:cond delay="0"/>
-                                  </p:stCondLst>
-                                  <p:childTnLst>
-                                    <p:set>
-                                      <p:cBhvr>
-                                        <p:cTn dur="1" fill="hold">
-                                          <p:stCondLst>
-                                            <p:cond delay="0"/>
-                                          </p:stCondLst>
-                                        </p:cTn>
-                                        <p:tgtEl>
-                                          <p:spTgt spid="146">
-                                            <p:txEl>
-                                              <p:pRg end="6" st="6"/>
-                                            </p:txEl>
-                                          </p:spTgt>
-                                        </p:tgtEl>
-                                        <p:attrNameLst>
-                                          <p:attrName>style.visibility</p:attrName>
-                                        </p:attrNameLst>
-                                      </p:cBhvr>
-                                      <p:to>
-                                        <p:strVal val="visible"/>
-                                      </p:to>
-                                    </p:set>
-                                  </p:childTnLst>
-                                </p:cTn>
-                              </p:par>
-                            </p:childTnLst>
-                          </p:cTn>
-                        </p:par>
-                      </p:childTnLst>
-                    </p:cTn>
-                  </p:par>
-                  <p:par>
-                    <p:cTn fill="hold">
-                      <p:stCondLst>
-                        <p:cond delay="indefinite"/>
-                      </p:stCondLst>
-                      <p:childTnLst>
-                        <p:par>
-                          <p:cTn fill="hold">
-                            <p:stCondLst>
-                              <p:cond delay="0"/>
-                            </p:stCondLst>
-                            <p:childTnLst>
-                              <p:par>
-                                <p:cTn fill="hold" nodeType="clickEffect" presetClass="entr" presetID="1" presetSubtype="0">
-                                  <p:stCondLst>
-                                    <p:cond delay="0"/>
-                                  </p:stCondLst>
-                                  <p:childTnLst>
-                                    <p:set>
-                                      <p:cBhvr>
-                                        <p:cTn dur="1" fill="hold">
-                                          <p:stCondLst>
-                                            <p:cond delay="0"/>
-                                          </p:stCondLst>
-                                        </p:cTn>
-                                        <p:tgtEl>
-                                          <p:spTgt spid="146">
-                                            <p:txEl>
-                                              <p:pRg end="7" st="7"/>
-                                            </p:txEl>
-                                          </p:spTgt>
-                                        </p:tgtEl>
-                                        <p:attrNameLst>
-                                          <p:attrName>style.visibility</p:attrName>
-                                        </p:attrNameLst>
-                                      </p:cBhvr>
-                                      <p:to>
-                                        <p:strVal val="visible"/>
-                                      </p:to>
-                                    </p:set>
-                                  </p:childTnLst>
-                                </p:cTn>
-                              </p:par>
-                            </p:childTnLst>
-                          </p:cTn>
-                        </p:par>
-                      </p:childTnLst>
-                    </p:cTn>
-                  </p:par>
-                  <p:par>
-                    <p:cTn fill="hold">
-                      <p:stCondLst>
-                        <p:cond delay="indefinite"/>
-                      </p:stCondLst>
-                      <p:childTnLst>
-                        <p:par>
-                          <p:cTn fill="hold">
-                            <p:stCondLst>
-                              <p:cond delay="0"/>
-                            </p:stCondLst>
-                            <p:childTnLst>
-                              <p:par>
-                                <p:cTn fill="hold" nodeType="clickEffect" presetClass="entr" presetID="1" presetSubtype="0">
-                                  <p:stCondLst>
-                                    <p:cond delay="0"/>
-                                  </p:stCondLst>
-                                  <p:childTnLst>
-                                    <p:set>
-                                      <p:cBhvr>
-                                        <p:cTn dur="1" fill="hold">
-                                          <p:stCondLst>
-                                            <p:cond delay="0"/>
-                                          </p:stCondLst>
-                                        </p:cTn>
-                                        <p:tgtEl>
-                                          <p:spTgt spid="146">
-                                            <p:txEl>
-                                              <p:pRg end="8" st="8"/>
-                                            </p:txEl>
-                                          </p:spTgt>
-                                        </p:tgtEl>
-                                        <p:attrNameLst>
-                                          <p:attrName>style.visibility</p:attrName>
-                                        </p:attrNameLst>
-                                      </p:cBhvr>
-                                      <p:to>
-                                        <p:strVal val="visible"/>
-                                      </p:to>
-                                    </p:set>
-                                  </p:childTnLst>
-                                </p:cTn>
-                              </p:par>
-                            </p:childTnLst>
-                          </p:cTn>
-                        </p:par>
-                      </p:childTnLst>
-                    </p:cTn>
-                  </p:par>
-                </p:childTnLst>
-              </p:cTn>
-              <p:prevCondLst>
-                <p:cond evt="onPrev">
-                  <p:tgtEl>
-                    <p:sldTgt/>
-                  </p:tgtEl>
-                </p:cond>
-              </p:prevCondLst>
-              <p:nextCondLst>
-                <p:cond evt="onNext">
-                  <p:tgtEl>
-                    <p:sldTgt/>
-                  </p:tgtEl>
-                </p:cond>
-              </p:nextCondLst>
-            </p:seq>
-          </p:childTnLst>
-        </p:cTn>
-      </p:par>
-    </p:tnLst>
-  </p:timing>
 </p:sld>
 </file>
 
@@ -15351,7 +14588,7 @@
                 <a:cs typeface="Calibri"/>
                 <a:sym typeface="Calibri"/>
               </a:rPr>
-              <a:t>Scope of work</a:t>
+              <a:t>General block diagram</a:t>
             </a:r>
             <a:endParaRPr b="1" i="0" sz="2800" u="none" cap="none" strike="noStrike">
               <a:solidFill>
@@ -15368,341 +14605,6 @@
       <p:sp>
         <p:nvSpPr>
           <p:cNvPr id="153" name="Google Shape;153;p24"/>
-          <p:cNvSpPr txBox="1"/>
-          <p:nvPr>
-            <p:ph idx="1" type="body"/>
-          </p:nvPr>
-        </p:nvSpPr>
-        <p:spPr>
-          <a:xfrm>
-            <a:off x="762000" y="1085850"/>
-            <a:ext cx="4114800" cy="3657600"/>
-          </a:xfrm>
-          <a:prstGeom prst="rect">
-            <a:avLst/>
-          </a:prstGeom>
-          <a:noFill/>
-          <a:ln>
-            <a:noFill/>
-          </a:ln>
-        </p:spPr>
-        <p:txBody>
-          <a:bodyPr anchorCtr="0" anchor="t" bIns="45700" lIns="91425" spcFirstLastPara="1" rIns="91425" wrap="square" tIns="45700">
-            <a:noAutofit/>
-          </a:bodyPr>
-          <a:lstStyle/>
-          <a:p>
-            <a:pPr indent="-219075" lvl="0" marL="231775" marR="0" rtl="0" algn="l">
-              <a:spcBef>
-                <a:spcPts val="0"/>
-              </a:spcBef>
-              <a:spcAft>
-                <a:spcPts val="0"/>
-              </a:spcAft>
-              <a:buClr>
-                <a:schemeClr val="dk1"/>
-              </a:buClr>
-              <a:buSzPts val="2200"/>
-              <a:buFont typeface="Noto Sans Symbols"/>
-              <a:buChar char="▪"/>
-            </a:pPr>
-            <a:r>
-              <a:rPr b="0" i="0" lang="pt-BR" sz="2200" u="none" cap="none" strike="noStrike">
-                <a:solidFill>
-                  <a:schemeClr val="dk1"/>
-                </a:solidFill>
-                <a:latin typeface="Calibri"/>
-                <a:ea typeface="Calibri"/>
-                <a:cs typeface="Calibri"/>
-                <a:sym typeface="Calibri"/>
-              </a:rPr>
-              <a:t>New classes added to the mobility module</a:t>
-            </a:r>
-            <a:endParaRPr sz="2200"/>
-          </a:p>
-          <a:p>
-            <a:pPr indent="-79375" lvl="0" marL="231775" marR="0" rtl="0" algn="l">
-              <a:spcBef>
-                <a:spcPts val="480"/>
-              </a:spcBef>
-              <a:spcAft>
-                <a:spcPts val="0"/>
-              </a:spcAft>
-              <a:buClr>
-                <a:schemeClr val="dk1"/>
-              </a:buClr>
-              <a:buSzPts val="2400"/>
-              <a:buFont typeface="Noto Sans Symbols"/>
-              <a:buNone/>
-            </a:pPr>
-            <a:r>
-              <a:t/>
-            </a:r>
-            <a:endParaRPr b="0" i="0" sz="2200" u="none" cap="none" strike="noStrike">
-              <a:solidFill>
-                <a:schemeClr val="dk1"/>
-              </a:solidFill>
-              <a:latin typeface="Calibri"/>
-              <a:ea typeface="Calibri"/>
-              <a:cs typeface="Calibri"/>
-              <a:sym typeface="Calibri"/>
-            </a:endParaRPr>
-          </a:p>
-          <a:p>
-            <a:pPr indent="-219075" lvl="0" marL="231775" marR="0" rtl="0" algn="l">
-              <a:spcBef>
-                <a:spcPts val="480"/>
-              </a:spcBef>
-              <a:spcAft>
-                <a:spcPts val="0"/>
-              </a:spcAft>
-              <a:buClr>
-                <a:schemeClr val="dk1"/>
-              </a:buClr>
-              <a:buSzPts val="2200"/>
-              <a:buFont typeface="Noto Sans Symbols"/>
-              <a:buChar char="▪"/>
-            </a:pPr>
-            <a:r>
-              <a:rPr b="0" i="0" lang="pt-BR" sz="2200" u="none" cap="none" strike="noStrike">
-                <a:solidFill>
-                  <a:schemeClr val="dk1"/>
-                </a:solidFill>
-                <a:latin typeface="Calibri"/>
-                <a:ea typeface="Calibri"/>
-                <a:cs typeface="Calibri"/>
-                <a:sym typeface="Calibri"/>
-              </a:rPr>
-              <a:t>Modification of existing auxiliary classes</a:t>
-            </a:r>
-            <a:endParaRPr sz="2200"/>
-          </a:p>
-          <a:p>
-            <a:pPr indent="-273050" lvl="1" marL="742950" marR="0" rtl="0" algn="l">
-              <a:spcBef>
-                <a:spcPts val="480"/>
-              </a:spcBef>
-              <a:spcAft>
-                <a:spcPts val="0"/>
-              </a:spcAft>
-              <a:buClr>
-                <a:schemeClr val="dk1"/>
-              </a:buClr>
-              <a:buSzPts val="2200"/>
-              <a:buFont typeface="Merriweather Sans"/>
-              <a:buChar char="−"/>
-            </a:pPr>
-            <a:r>
-              <a:rPr b="0" i="0" lang="pt-BR" sz="2200" u="none" cap="none" strike="noStrike">
-                <a:solidFill>
-                  <a:schemeClr val="dk1"/>
-                </a:solidFill>
-                <a:latin typeface="Calibri"/>
-                <a:ea typeface="Calibri"/>
-                <a:cs typeface="Calibri"/>
-                <a:sym typeface="Calibri"/>
-              </a:rPr>
-              <a:t>No functions were removed/modified</a:t>
-            </a:r>
-            <a:endParaRPr sz="2200"/>
-          </a:p>
-          <a:p>
-            <a:pPr indent="-273050" lvl="1" marL="742950" marR="0" rtl="0" algn="l">
-              <a:spcBef>
-                <a:spcPts val="480"/>
-              </a:spcBef>
-              <a:spcAft>
-                <a:spcPts val="0"/>
-              </a:spcAft>
-              <a:buClr>
-                <a:schemeClr val="dk1"/>
-              </a:buClr>
-              <a:buSzPts val="2200"/>
-              <a:buFont typeface="Merriweather Sans"/>
-              <a:buChar char="−"/>
-            </a:pPr>
-            <a:r>
-              <a:rPr b="0" i="0" lang="pt-BR" sz="2200" u="none" cap="none" strike="noStrike">
-                <a:solidFill>
-                  <a:schemeClr val="dk1"/>
-                </a:solidFill>
-                <a:latin typeface="Calibri"/>
-                <a:ea typeface="Calibri"/>
-                <a:cs typeface="Calibri"/>
-                <a:sym typeface="Calibri"/>
-              </a:rPr>
-              <a:t>Only new methods added to account for 3D geometry</a:t>
-            </a:r>
-            <a:endParaRPr sz="2200"/>
-          </a:p>
-        </p:txBody>
-      </p:sp>
-      <p:pic>
-        <p:nvPicPr>
-          <p:cNvPr id="154" name="Google Shape;154;p24"/>
-          <p:cNvPicPr preferRelativeResize="0"/>
-          <p:nvPr/>
-        </p:nvPicPr>
-        <p:blipFill rotWithShape="1">
-          <a:blip r:embed="rId3">
-            <a:alphaModFix/>
-          </a:blip>
-          <a:srcRect b="0" l="0" r="0" t="0"/>
-          <a:stretch/>
-        </p:blipFill>
-        <p:spPr>
-          <a:xfrm>
-            <a:off x="4921897" y="1021550"/>
-            <a:ext cx="3917301" cy="2628900"/>
-          </a:xfrm>
-          <a:prstGeom prst="rect">
-            <a:avLst/>
-          </a:prstGeom>
-          <a:noFill/>
-          <a:ln>
-            <a:noFill/>
-          </a:ln>
-        </p:spPr>
-      </p:pic>
-      <p:sp>
-        <p:nvSpPr>
-          <p:cNvPr id="155" name="Google Shape;155;p24"/>
-          <p:cNvSpPr txBox="1"/>
-          <p:nvPr>
-            <p:ph idx="4294967295" type="sldNum"/>
-          </p:nvPr>
-        </p:nvSpPr>
-        <p:spPr>
-          <a:xfrm>
-            <a:off x="7010400" y="4914899"/>
-            <a:ext cx="2133600" cy="228600"/>
-          </a:xfrm>
-          <a:prstGeom prst="rect">
-            <a:avLst/>
-          </a:prstGeom>
-          <a:noFill/>
-          <a:ln>
-            <a:noFill/>
-          </a:ln>
-        </p:spPr>
-        <p:txBody>
-          <a:bodyPr anchorCtr="0" anchor="t" bIns="45700" lIns="91425" spcFirstLastPara="1" rIns="91425" wrap="square" tIns="45700">
-            <a:noAutofit/>
-          </a:bodyPr>
-          <a:lstStyle/>
-          <a:p>
-            <a:pPr indent="0" lvl="0" marL="0" rtl="0" algn="r">
-              <a:spcBef>
-                <a:spcPts val="0"/>
-              </a:spcBef>
-              <a:spcAft>
-                <a:spcPts val="0"/>
-              </a:spcAft>
-              <a:buClr>
-                <a:srgbClr val="000000"/>
-              </a:buClr>
-              <a:buFont typeface="Arial"/>
-              <a:buNone/>
-            </a:pPr>
-            <a:fld id="{00000000-1234-1234-1234-123412341234}" type="slidenum">
-              <a:rPr lang="pt-BR"/>
-              <a:t>‹#›</a:t>
-            </a:fld>
-            <a:endParaRPr/>
-          </a:p>
-        </p:txBody>
-      </p:sp>
-    </p:spTree>
-  </p:cSld>
-  <p:clrMapOvr>
-    <a:masterClrMapping/>
-  </p:clrMapOvr>
-</p:sld>
-</file>
-
-<file path=ppt/slides/slide12.xml><?xml version="1.0" encoding="utf-8"?>
-<p:sld xmlns:a="http://schemas.openxmlformats.org/drawingml/2006/main" xmlns:r="http://schemas.openxmlformats.org/officeDocument/2006/relationships" xmlns:mc="http://schemas.openxmlformats.org/markup-compatibility/2006" xmlns:mv="urn:schemas-microsoft-com:mac:vml" xmlns:p="http://schemas.openxmlformats.org/presentationml/2006/main" xmlns:c="http://schemas.openxmlformats.org/drawingml/2006/chart" xmlns:dgm="http://schemas.openxmlformats.org/drawingml/2006/diagram" xmlns:o="urn:schemas-microsoft-com:office:office" xmlns:v="urn:schemas-microsoft-com:vml" xmlns:pvml="urn:schemas-microsoft-com:office:powerpoint" xmlns:com="http://schemas.openxmlformats.org/drawingml/2006/compatibility" xmlns:p14="http://schemas.microsoft.com/office/powerpoint/2010/main" xmlns:p15="http://schemas.microsoft.com/office/powerpoint/2012/main">
-  <p:cSld>
-    <p:spTree>
-      <p:nvGrpSpPr>
-        <p:cNvPr id="159" name="Shape 159"/>
-        <p:cNvGrpSpPr/>
-        <p:nvPr/>
-      </p:nvGrpSpPr>
-      <p:grpSpPr>
-        <a:xfrm>
-          <a:off x="0" y="0"/>
-          <a:ext cx="0" cy="0"/>
-          <a:chOff x="0" y="0"/>
-          <a:chExt cx="0" cy="0"/>
-        </a:xfrm>
-      </p:grpSpPr>
-      <p:sp>
-        <p:nvSpPr>
-          <p:cNvPr id="160" name="Google Shape;160;p25"/>
-          <p:cNvSpPr txBox="1"/>
-          <p:nvPr>
-            <p:ph type="title"/>
-          </p:nvPr>
-        </p:nvSpPr>
-        <p:spPr>
-          <a:xfrm>
-            <a:off x="1447800" y="285750"/>
-            <a:ext cx="7391400" cy="571500"/>
-          </a:xfrm>
-          <a:prstGeom prst="rect">
-            <a:avLst/>
-          </a:prstGeom>
-          <a:noFill/>
-          <a:ln>
-            <a:noFill/>
-          </a:ln>
-        </p:spPr>
-        <p:txBody>
-          <a:bodyPr anchorCtr="0" anchor="ctr" bIns="45700" lIns="91425" spcFirstLastPara="1" rIns="91425" wrap="square" tIns="45700">
-            <a:noAutofit/>
-          </a:bodyPr>
-          <a:lstStyle/>
-          <a:p>
-            <a:pPr indent="0" lvl="0" marL="0" marR="0" rtl="0" algn="l">
-              <a:lnSpc>
-                <a:spcPct val="90000"/>
-              </a:lnSpc>
-              <a:spcBef>
-                <a:spcPts val="0"/>
-              </a:spcBef>
-              <a:spcAft>
-                <a:spcPts val="0"/>
-              </a:spcAft>
-              <a:buNone/>
-            </a:pPr>
-            <a:r>
-              <a:rPr b="1" i="0" lang="pt-BR" sz="2800" u="none" cap="none" strike="noStrike">
-                <a:solidFill>
-                  <a:schemeClr val="dk2"/>
-                </a:solidFill>
-                <a:latin typeface="Calibri"/>
-                <a:ea typeface="Calibri"/>
-                <a:cs typeface="Calibri"/>
-                <a:sym typeface="Calibri"/>
-              </a:rPr>
-              <a:t>General block diagram</a:t>
-            </a:r>
-            <a:endParaRPr b="1" i="0" sz="2800" u="none" cap="none" strike="noStrike">
-              <a:solidFill>
-                <a:schemeClr val="dk2"/>
-              </a:solidFill>
-              <a:latin typeface="Calibri"/>
-              <a:ea typeface="Calibri"/>
-              <a:cs typeface="Calibri"/>
-              <a:sym typeface="Calibri"/>
-            </a:endParaRPr>
-          </a:p>
-        </p:txBody>
-      </p:sp>
-      <p:sp>
-        <p:nvSpPr>
-          <p:cNvPr id="161" name="Google Shape;161;p25"/>
           <p:cNvSpPr txBox="1"/>
           <p:nvPr>
             <p:ph idx="1" type="body"/>
@@ -15833,7 +14735,7 @@
       </p:sp>
       <p:pic>
         <p:nvPicPr>
-          <p:cNvPr id="162" name="Google Shape;162;p25"/>
+          <p:cNvPr id="154" name="Google Shape;154;p24"/>
           <p:cNvPicPr preferRelativeResize="0"/>
           <p:nvPr/>
         </p:nvPicPr>
@@ -15860,7 +14762,7 @@
       </p:pic>
       <p:pic>
         <p:nvPicPr>
-          <p:cNvPr id="163" name="Google Shape;163;p25"/>
+          <p:cNvPr id="155" name="Google Shape;155;p24"/>
           <p:cNvPicPr preferRelativeResize="0"/>
           <p:nvPr/>
         </p:nvPicPr>
@@ -15887,7 +14789,7 @@
       </p:pic>
       <p:sp>
         <p:nvSpPr>
-          <p:cNvPr id="164" name="Google Shape;164;p25"/>
+          <p:cNvPr id="156" name="Google Shape;156;p24"/>
           <p:cNvSpPr txBox="1"/>
           <p:nvPr>
             <p:ph idx="4294967295" type="sldNum"/>
@@ -15972,7 +14874,7 @@
                                           </p:stCondLst>
                                         </p:cTn>
                                         <p:tgtEl>
-                                          <p:spTgt spid="161">
+                                          <p:spTgt spid="153">
                                             <p:txEl>
                                               <p:pRg end="0" st="0"/>
                                             </p:txEl>
@@ -16021,7 +14923,7 @@
                                           </p:stCondLst>
                                         </p:cTn>
                                         <p:tgtEl>
-                                          <p:spTgt spid="161">
+                                          <p:spTgt spid="153">
                                             <p:txEl>
                                               <p:pRg end="1" st="1"/>
                                             </p:txEl>
@@ -16070,7 +14972,7 @@
                                           </p:stCondLst>
                                         </p:cTn>
                                         <p:tgtEl>
-                                          <p:spTgt spid="161">
+                                          <p:spTgt spid="153">
                                             <p:txEl>
                                               <p:pRg end="2" st="2"/>
                                             </p:txEl>
@@ -16118,12 +15020,12 @@
 </p:sld>
 </file>
 
-<file path=ppt/slides/slide13.xml><?xml version="1.0" encoding="utf-8"?>
+<file path=ppt/slides/slide12.xml><?xml version="1.0" encoding="utf-8"?>
 <p:sld xmlns:a="http://schemas.openxmlformats.org/drawingml/2006/main" xmlns:r="http://schemas.openxmlformats.org/officeDocument/2006/relationships" xmlns:mc="http://schemas.openxmlformats.org/markup-compatibility/2006" xmlns:mv="urn:schemas-microsoft-com:mac:vml" xmlns:p="http://schemas.openxmlformats.org/presentationml/2006/main" xmlns:c="http://schemas.openxmlformats.org/drawingml/2006/chart" xmlns:dgm="http://schemas.openxmlformats.org/drawingml/2006/diagram" xmlns:o="urn:schemas-microsoft-com:office:office" xmlns:v="urn:schemas-microsoft-com:vml" xmlns:pvml="urn:schemas-microsoft-com:office:powerpoint" xmlns:com="http://schemas.openxmlformats.org/drawingml/2006/compatibility" xmlns:p14="http://schemas.microsoft.com/office/powerpoint/2010/main" xmlns:p15="http://schemas.microsoft.com/office/powerpoint/2012/main">
   <p:cSld>
     <p:spTree>
       <p:nvGrpSpPr>
-        <p:cNvPr id="168" name="Shape 168"/>
+        <p:cNvPr id="160" name="Shape 160"/>
         <p:cNvGrpSpPr/>
         <p:nvPr/>
       </p:nvGrpSpPr>
@@ -16137,7 +15039,7 @@
       </p:grpSpPr>
       <p:pic>
         <p:nvPicPr>
-          <p:cNvPr descr="The 3D trajectory resulted from the Random Walk 3D mobility model in the presence of an obstacle, in distance mode.&#10;&#10;Project website: http://www.cse.unr.edu/~regis/ns-3" id="169" name="Google Shape;169;p26" title="Random Walk (distance mode) 3D with obstacle">
+          <p:cNvPr descr="The 3D trajectory resulted from the Random Walk 3D mobility model in the presence of an obstacle, in distance mode.&#10;&#10;Project website: http://www.cse.unr.edu/~regis/ns-3" id="161" name="Google Shape;161;p25" title="Random Walk (distance mode) 3D with obstacle">
             <a:hlinkClick r:id="rId3"/>
           </p:cNvPr>
           <p:cNvPicPr preferRelativeResize="0"/>
@@ -16167,7 +15069,7 @@
       </p:pic>
       <p:pic>
         <p:nvPicPr>
-          <p:cNvPr descr="The 3D trajectory resulted from the Random Walk 3D mobility model in the presence of an obstacle, in time mode.&#10;&#10;Project website: http://www.cse.unr.edu/~regis/ns-3" id="170" name="Google Shape;170;p26" title="Random Walk (time mode) 3D with obstacle">
+          <p:cNvPr descr="The 3D trajectory resulted from the Random Walk 3D mobility model in the presence of an obstacle, in time mode.&#10;&#10;Project website: http://www.cse.unr.edu/~regis/ns-3" id="162" name="Google Shape;162;p25" title="Random Walk (time mode) 3D with obstacle">
             <a:hlinkClick r:id="rId5"/>
           </p:cNvPr>
           <p:cNvPicPr preferRelativeResize="0"/>
@@ -16197,7 +15099,7 @@
       </p:pic>
       <p:sp>
         <p:nvSpPr>
-          <p:cNvPr id="171" name="Google Shape;171;p26"/>
+          <p:cNvPr id="163" name="Google Shape;163;p25"/>
           <p:cNvSpPr txBox="1"/>
           <p:nvPr/>
         </p:nvSpPr>
@@ -16239,7 +15141,7 @@
       </p:sp>
       <p:sp>
         <p:nvSpPr>
-          <p:cNvPr id="172" name="Google Shape;172;p26"/>
+          <p:cNvPr id="164" name="Google Shape;164;p25"/>
           <p:cNvSpPr txBox="1"/>
           <p:nvPr/>
         </p:nvSpPr>
@@ -16281,7 +15183,7 @@
       </p:sp>
       <p:pic>
         <p:nvPicPr>
-          <p:cNvPr descr="The 3D trajectory resulted from the Random Direction 3D mobility model in the presence of an obstacle.&#10;&#10;Project website: http://www.cse.unr.edu/~regis/ns-3" id="173" name="Google Shape;173;p26" title="Random Direction 3D with obstacle">
+          <p:cNvPr descr="The 3D trajectory resulted from the Random Direction 3D mobility model in the presence of an obstacle.&#10;&#10;Project website: http://www.cse.unr.edu/~regis/ns-3" id="165" name="Google Shape;165;p25" title="Random Direction 3D with obstacle">
             <a:hlinkClick r:id="rId7"/>
           </p:cNvPr>
           <p:cNvPicPr preferRelativeResize="0"/>
@@ -16311,7 +15213,7 @@
       </p:pic>
       <p:sp>
         <p:nvSpPr>
-          <p:cNvPr id="174" name="Google Shape;174;p26"/>
+          <p:cNvPr id="166" name="Google Shape;166;p25"/>
           <p:cNvSpPr txBox="1"/>
           <p:nvPr/>
         </p:nvSpPr>
@@ -16353,7 +15255,7 @@
       </p:sp>
       <p:pic>
         <p:nvPicPr>
-          <p:cNvPr descr="The 3D trajectory resulted from the Gauss-Markov mobility model in the presence of an obstacle.&#10;&#10;Project website: http://www.cse.unr.edu/~regis/ns-3" id="175" name="Google Shape;175;p26" title="Gauss-Markov with obstacle">
+          <p:cNvPr descr="The 3D trajectory resulted from the Gauss-Markov mobility model in the presence of an obstacle.&#10;&#10;Project website: http://www.cse.unr.edu/~regis/ns-3" id="167" name="Google Shape;167;p25" title="Gauss-Markov with obstacle">
             <a:hlinkClick r:id="rId9"/>
           </p:cNvPr>
           <p:cNvPicPr preferRelativeResize="0"/>
@@ -16383,7 +15285,7 @@
       </p:pic>
       <p:sp>
         <p:nvSpPr>
-          <p:cNvPr id="176" name="Google Shape;176;p26"/>
+          <p:cNvPr id="168" name="Google Shape;168;p25"/>
           <p:cNvSpPr txBox="1"/>
           <p:nvPr/>
         </p:nvSpPr>
@@ -16431,12 +15333,12 @@
 </p:sld>
 </file>
 
-<file path=ppt/slides/slide14.xml><?xml version="1.0" encoding="utf-8"?>
+<file path=ppt/slides/slide13.xml><?xml version="1.0" encoding="utf-8"?>
 <p:sld xmlns:a="http://schemas.openxmlformats.org/drawingml/2006/main" xmlns:r="http://schemas.openxmlformats.org/officeDocument/2006/relationships" xmlns:mc="http://schemas.openxmlformats.org/markup-compatibility/2006" xmlns:mv="urn:schemas-microsoft-com:mac:vml" xmlns:p="http://schemas.openxmlformats.org/presentationml/2006/main" xmlns:c="http://schemas.openxmlformats.org/drawingml/2006/chart" xmlns:dgm="http://schemas.openxmlformats.org/drawingml/2006/diagram" xmlns:o="urn:schemas-microsoft-com:office:office" xmlns:v="urn:schemas-microsoft-com:vml" xmlns:pvml="urn:schemas-microsoft-com:office:powerpoint" xmlns:com="http://schemas.openxmlformats.org/drawingml/2006/compatibility" xmlns:p14="http://schemas.microsoft.com/office/powerpoint/2010/main" xmlns:p15="http://schemas.microsoft.com/office/powerpoint/2012/main">
   <p:cSld>
     <p:spTree>
       <p:nvGrpSpPr>
-        <p:cNvPr id="180" name="Shape 180"/>
+        <p:cNvPr id="172" name="Shape 172"/>
         <p:cNvGrpSpPr/>
         <p:nvPr/>
       </p:nvGrpSpPr>
@@ -16450,7 +15352,7 @@
       </p:grpSpPr>
       <p:sp>
         <p:nvSpPr>
-          <p:cNvPr id="181" name="Google Shape;181;p27"/>
+          <p:cNvPr id="173" name="Google Shape;173;p26"/>
           <p:cNvSpPr txBox="1"/>
           <p:nvPr>
             <p:ph type="title"/>
@@ -16513,7 +15415,7 @@
       </p:sp>
       <p:sp>
         <p:nvSpPr>
-          <p:cNvPr id="182" name="Google Shape;182;p27"/>
+          <p:cNvPr id="174" name="Google Shape;174;p26"/>
           <p:cNvSpPr txBox="1"/>
           <p:nvPr>
             <p:ph idx="1" type="body"/>
@@ -16799,7 +15701,7 @@
       </p:sp>
       <p:sp>
         <p:nvSpPr>
-          <p:cNvPr id="183" name="Google Shape;183;p27"/>
+          <p:cNvPr id="175" name="Google Shape;175;p26"/>
           <p:cNvSpPr txBox="1"/>
           <p:nvPr>
             <p:ph idx="4294967295" type="sldNum"/>
@@ -16853,12 +15755,12 @@
 </p:sld>
 </file>
 
-<file path=ppt/slides/slide15.xml><?xml version="1.0" encoding="utf-8"?>
+<file path=ppt/slides/slide14.xml><?xml version="1.0" encoding="utf-8"?>
 <p:sld xmlns:a="http://schemas.openxmlformats.org/drawingml/2006/main" xmlns:r="http://schemas.openxmlformats.org/officeDocument/2006/relationships" xmlns:mc="http://schemas.openxmlformats.org/markup-compatibility/2006" xmlns:mv="urn:schemas-microsoft-com:mac:vml" xmlns:p="http://schemas.openxmlformats.org/presentationml/2006/main" xmlns:c="http://schemas.openxmlformats.org/drawingml/2006/chart" xmlns:dgm="http://schemas.openxmlformats.org/drawingml/2006/diagram" xmlns:o="urn:schemas-microsoft-com:office:office" xmlns:v="urn:schemas-microsoft-com:vml" xmlns:pvml="urn:schemas-microsoft-com:office:powerpoint" xmlns:com="http://schemas.openxmlformats.org/drawingml/2006/compatibility" xmlns:p14="http://schemas.microsoft.com/office/powerpoint/2010/main" xmlns:p15="http://schemas.microsoft.com/office/powerpoint/2012/main">
   <p:cSld>
     <p:spTree>
       <p:nvGrpSpPr>
-        <p:cNvPr id="187" name="Shape 187"/>
+        <p:cNvPr id="179" name="Shape 179"/>
         <p:cNvGrpSpPr/>
         <p:nvPr/>
       </p:nvGrpSpPr>
@@ -16872,7 +15774,7 @@
       </p:grpSpPr>
       <p:sp>
         <p:nvSpPr>
-          <p:cNvPr id="188" name="Google Shape;188;p28"/>
+          <p:cNvPr id="180" name="Google Shape;180;p27"/>
           <p:cNvSpPr txBox="1"/>
           <p:nvPr>
             <p:ph type="title"/>
@@ -16912,7 +15814,7 @@
       </p:sp>
       <p:sp>
         <p:nvSpPr>
-          <p:cNvPr id="189" name="Google Shape;189;p28"/>
+          <p:cNvPr id="181" name="Google Shape;181;p27"/>
           <p:cNvSpPr txBox="1"/>
           <p:nvPr>
             <p:ph idx="1" type="body"/>
@@ -17002,7 +15904,7 @@
       </p:sp>
       <p:sp>
         <p:nvSpPr>
-          <p:cNvPr id="190" name="Google Shape;190;p28"/>
+          <p:cNvPr id="182" name="Google Shape;182;p27"/>
           <p:cNvSpPr txBox="1"/>
           <p:nvPr>
             <p:ph idx="4294967295" type="sldNum"/>
@@ -17056,12 +15958,12 @@
 </p:sld>
 </file>
 
-<file path=ppt/slides/slide16.xml><?xml version="1.0" encoding="utf-8"?>
+<file path=ppt/slides/slide15.xml><?xml version="1.0" encoding="utf-8"?>
 <p:sld xmlns:a="http://schemas.openxmlformats.org/drawingml/2006/main" xmlns:r="http://schemas.openxmlformats.org/officeDocument/2006/relationships" xmlns:mc="http://schemas.openxmlformats.org/markup-compatibility/2006" xmlns:mv="urn:schemas-microsoft-com:mac:vml" xmlns:p="http://schemas.openxmlformats.org/presentationml/2006/main" xmlns:c="http://schemas.openxmlformats.org/drawingml/2006/chart" xmlns:dgm="http://schemas.openxmlformats.org/drawingml/2006/diagram" xmlns:o="urn:schemas-microsoft-com:office:office" xmlns:v="urn:schemas-microsoft-com:vml" xmlns:pvml="urn:schemas-microsoft-com:office:powerpoint" xmlns:com="http://schemas.openxmlformats.org/drawingml/2006/compatibility" xmlns:p14="http://schemas.microsoft.com/office/powerpoint/2010/main" xmlns:p15="http://schemas.microsoft.com/office/powerpoint/2012/main">
   <p:cSld>
     <p:spTree>
       <p:nvGrpSpPr>
-        <p:cNvPr id="194" name="Shape 194"/>
+        <p:cNvPr id="186" name="Shape 186"/>
         <p:cNvGrpSpPr/>
         <p:nvPr/>
       </p:nvGrpSpPr>
@@ -17075,7 +15977,7 @@
       </p:grpSpPr>
       <p:sp>
         <p:nvSpPr>
-          <p:cNvPr id="195" name="Google Shape;195;p29"/>
+          <p:cNvPr id="187" name="Google Shape;187;p28"/>
           <p:cNvSpPr txBox="1"/>
           <p:nvPr>
             <p:ph type="title"/>
@@ -17115,7 +16017,7 @@
       </p:sp>
       <p:sp>
         <p:nvSpPr>
-          <p:cNvPr id="196" name="Google Shape;196;p29"/>
+          <p:cNvPr id="188" name="Google Shape;188;p28"/>
           <p:cNvSpPr txBox="1"/>
           <p:nvPr>
             <p:ph idx="1" type="body"/>
@@ -17205,7 +16107,7 @@
       </p:sp>
       <p:sp>
         <p:nvSpPr>
-          <p:cNvPr id="197" name="Google Shape;197;p29"/>
+          <p:cNvPr id="189" name="Google Shape;189;p28"/>
           <p:cNvSpPr txBox="1"/>
           <p:nvPr>
             <p:ph idx="4294967295" type="sldNum"/>
@@ -17259,12 +16161,12 @@
 </p:sld>
 </file>
 
-<file path=ppt/slides/slide17.xml><?xml version="1.0" encoding="utf-8"?>
+<file path=ppt/slides/slide16.xml><?xml version="1.0" encoding="utf-8"?>
 <p:sld xmlns:a="http://schemas.openxmlformats.org/drawingml/2006/main" xmlns:r="http://schemas.openxmlformats.org/officeDocument/2006/relationships" xmlns:mc="http://schemas.openxmlformats.org/markup-compatibility/2006" xmlns:mv="urn:schemas-microsoft-com:mac:vml" xmlns:p="http://schemas.openxmlformats.org/presentationml/2006/main" xmlns:c="http://schemas.openxmlformats.org/drawingml/2006/chart" xmlns:dgm="http://schemas.openxmlformats.org/drawingml/2006/diagram" xmlns:o="urn:schemas-microsoft-com:office:office" xmlns:v="urn:schemas-microsoft-com:vml" xmlns:pvml="urn:schemas-microsoft-com:office:powerpoint" xmlns:com="http://schemas.openxmlformats.org/drawingml/2006/compatibility" xmlns:p14="http://schemas.microsoft.com/office/powerpoint/2010/main" xmlns:p15="http://schemas.microsoft.com/office/powerpoint/2012/main">
   <p:cSld>
     <p:spTree>
       <p:nvGrpSpPr>
-        <p:cNvPr id="201" name="Shape 201"/>
+        <p:cNvPr id="193" name="Shape 193"/>
         <p:cNvGrpSpPr/>
         <p:nvPr/>
       </p:nvGrpSpPr>
@@ -17278,7 +16180,7 @@
       </p:grpSpPr>
       <p:sp>
         <p:nvSpPr>
-          <p:cNvPr id="202" name="Google Shape;202;p30"/>
+          <p:cNvPr id="194" name="Google Shape;194;p29"/>
           <p:cNvSpPr txBox="1"/>
           <p:nvPr>
             <p:ph type="title"/>
@@ -17318,7 +16220,7 @@
       </p:sp>
       <p:sp>
         <p:nvSpPr>
-          <p:cNvPr id="203" name="Google Shape;203;p30"/>
+          <p:cNvPr id="195" name="Google Shape;195;p29"/>
           <p:cNvSpPr txBox="1"/>
           <p:nvPr>
             <p:ph idx="1" type="body"/>
@@ -17393,7 +16295,7 @@
       </p:sp>
       <p:sp>
         <p:nvSpPr>
-          <p:cNvPr id="204" name="Google Shape;204;p30"/>
+          <p:cNvPr id="196" name="Google Shape;196;p29"/>
           <p:cNvSpPr txBox="1"/>
           <p:nvPr>
             <p:ph idx="4294967295" type="sldNum"/>
@@ -17441,7 +16343,7 @@
       </p:sp>
       <p:pic>
         <p:nvPicPr>
-          <p:cNvPr descr="This is a demo video of an on-going multi-hop wireless mobile mesh network project.&#10;&#10;The wireless mesh network consists of 4 static nodes and 1 mobile node (the camera). The camera node streams to the first node (the screen being filmed). As it moves further and further, the stream quality drops (becomes laggier), until when it finally stops completely, when the camera loses connection with the network.&#10;&#10;Project website: https://github.com/regisin/olsrd" id="205" name="Google Shape;205;p30" title="Video streaming over a multi-hop mobile wireless mesh network">
+          <p:cNvPr descr="This is a demo video of an on-going multi-hop wireless mobile mesh network project.&#10;&#10;The wireless mesh network consists of 4 static nodes and 1 mobile node (the camera). The camera node streams to the first node (the screen being filmed). As it moves further and further, the stream quality drops (becomes laggier), until when it finally stops completely, when the camera loses connection with the network.&#10;&#10;Project website: https://github.com/regisin/olsrd" id="197" name="Google Shape;197;p29" title="Video streaming over a multi-hop mobile wireless mesh network">
             <a:hlinkClick r:id="rId3"/>
           </p:cNvPr>
           <p:cNvPicPr preferRelativeResize="0"/>
@@ -17477,12 +16379,12 @@
 </p:sld>
 </file>
 
-<file path=ppt/slides/slide18.xml><?xml version="1.0" encoding="utf-8"?>
+<file path=ppt/slides/slide17.xml><?xml version="1.0" encoding="utf-8"?>
 <p:sld xmlns:a="http://schemas.openxmlformats.org/drawingml/2006/main" xmlns:r="http://schemas.openxmlformats.org/officeDocument/2006/relationships" xmlns:mc="http://schemas.openxmlformats.org/markup-compatibility/2006" xmlns:mv="urn:schemas-microsoft-com:mac:vml" xmlns:p="http://schemas.openxmlformats.org/presentationml/2006/main" xmlns:c="http://schemas.openxmlformats.org/drawingml/2006/chart" xmlns:dgm="http://schemas.openxmlformats.org/drawingml/2006/diagram" xmlns:o="urn:schemas-microsoft-com:office:office" xmlns:v="urn:schemas-microsoft-com:vml" xmlns:pvml="urn:schemas-microsoft-com:office:powerpoint" xmlns:com="http://schemas.openxmlformats.org/drawingml/2006/compatibility" xmlns:p14="http://schemas.microsoft.com/office/powerpoint/2010/main" xmlns:p15="http://schemas.microsoft.com/office/powerpoint/2012/main">
   <p:cSld>
     <p:spTree>
       <p:nvGrpSpPr>
-        <p:cNvPr id="209" name="Shape 209"/>
+        <p:cNvPr id="201" name="Shape 201"/>
         <p:cNvGrpSpPr/>
         <p:nvPr/>
       </p:nvGrpSpPr>
@@ -17496,7 +16398,7 @@
       </p:grpSpPr>
       <p:sp>
         <p:nvSpPr>
-          <p:cNvPr id="210" name="Google Shape;210;p31"/>
+          <p:cNvPr id="202" name="Google Shape;202;p30"/>
           <p:cNvSpPr txBox="1"/>
           <p:nvPr>
             <p:ph idx="4294967295" type="sldNum"/>
@@ -17552,7 +16454,7 @@
       </p:sp>
       <p:sp>
         <p:nvSpPr>
-          <p:cNvPr id="211" name="Google Shape;211;p31"/>
+          <p:cNvPr id="203" name="Google Shape;203;p30"/>
           <p:cNvSpPr txBox="1"/>
           <p:nvPr/>
         </p:nvSpPr>
@@ -17613,7 +16515,7 @@
       </p:sp>
       <p:sp>
         <p:nvSpPr>
-          <p:cNvPr id="212" name="Google Shape;212;p31"/>
+          <p:cNvPr id="204" name="Google Shape;204;p30"/>
           <p:cNvSpPr txBox="1"/>
           <p:nvPr>
             <p:ph idx="4294967295" type="sldNum"/>
@@ -19001,7 +17903,7 @@
   <p:cSld>
     <p:spTree>
       <p:nvGrpSpPr>
-        <p:cNvPr id="129" name="Shape 129"/>
+        <p:cNvPr id="128" name="Shape 128"/>
         <p:cNvGrpSpPr/>
         <p:nvPr/>
       </p:nvGrpSpPr>
@@ -19015,7 +17917,7 @@
       </p:grpSpPr>
       <p:sp>
         <p:nvSpPr>
-          <p:cNvPr id="130" name="Google Shape;130;p21"/>
+          <p:cNvPr id="129" name="Google Shape;129;p21"/>
           <p:cNvSpPr txBox="1"/>
           <p:nvPr>
             <p:ph type="title"/>
@@ -19053,16 +17955,8 @@
               <a:buNone/>
             </a:pPr>
             <a:r>
-              <a:rPr b="1" i="0" lang="pt-BR" sz="2800" u="none" cap="none" strike="noStrike">
-                <a:solidFill>
-                  <a:schemeClr val="dk2"/>
-                </a:solidFill>
-                <a:latin typeface="Calibri"/>
-                <a:ea typeface="Calibri"/>
-                <a:cs typeface="Calibri"/>
-                <a:sym typeface="Calibri"/>
-              </a:rPr>
-              <a:t>Outline</a:t>
+              <a:rPr lang="pt-BR"/>
+              <a:t>3D obstacle compliant mobility model</a:t>
             </a:r>
             <a:endParaRPr b="1" i="0" sz="2800" u="none" cap="none" strike="noStrike">
               <a:solidFill>
@@ -19078,7 +17972,7 @@
       </p:sp>
       <p:sp>
         <p:nvSpPr>
-          <p:cNvPr id="131" name="Google Shape;131;p21"/>
+          <p:cNvPr id="130" name="Google Shape;130;p21"/>
           <p:cNvSpPr txBox="1"/>
           <p:nvPr>
             <p:ph idx="1" type="body"/>
@@ -19103,168 +17997,93 @@
           </a:bodyPr>
           <a:lstStyle/>
           <a:p>
-            <a:pPr indent="-231775" lvl="0" marL="231775" marR="0" rtl="0" algn="l">
-              <a:spcBef>
-                <a:spcPts val="0"/>
-              </a:spcBef>
-              <a:spcAft>
-                <a:spcPts val="0"/>
-              </a:spcAft>
-              <a:buClr>
-                <a:schemeClr val="dk1"/>
-              </a:buClr>
-              <a:buSzPts val="2800"/>
-              <a:buFont typeface="Noto Sans Symbols"/>
+            <a:pPr indent="-349250" lvl="0" marL="457200" marR="0" rtl="0" algn="l">
+              <a:spcBef>
+                <a:spcPts val="400"/>
+              </a:spcBef>
+              <a:spcAft>
+                <a:spcPts val="0"/>
+              </a:spcAft>
+              <a:buSzPts val="1900"/>
               <a:buChar char="▪"/>
             </a:pPr>
             <a:r>
-              <a:rPr b="0" i="0" lang="pt-BR" sz="2800" u="none" cap="none" strike="noStrike">
-                <a:solidFill>
-                  <a:schemeClr val="dk1"/>
-                </a:solidFill>
-                <a:latin typeface="Calibri"/>
-                <a:ea typeface="Calibri"/>
-                <a:cs typeface="Calibri"/>
-                <a:sym typeface="Calibri"/>
-              </a:rPr>
-              <a:t>Introduction</a:t>
+              <a:rPr lang="pt-BR" sz="1900"/>
+              <a:t>Network simulator (ns-3) provide vast amount of libraries to allow simulations of different communications scenarios and technologies.</a:t>
             </a:r>
-            <a:endParaRPr/>
+            <a:endParaRPr sz="1900"/>
           </a:p>
           <a:p>
-            <a:pPr indent="-231775" lvl="0" marL="231775" marR="0" rtl="0" algn="l">
-              <a:spcBef>
-                <a:spcPts val="560"/>
-              </a:spcBef>
-              <a:spcAft>
-                <a:spcPts val="0"/>
-              </a:spcAft>
-              <a:buClr>
-                <a:schemeClr val="dk1"/>
-              </a:buClr>
-              <a:buSzPts val="2800"/>
-              <a:buFont typeface="Noto Sans Symbols"/>
+            <a:pPr indent="-349250" lvl="0" marL="457200" marR="0" rtl="0" algn="l">
+              <a:spcBef>
+                <a:spcPts val="0"/>
+              </a:spcBef>
+              <a:spcAft>
+                <a:spcPts val="0"/>
+              </a:spcAft>
+              <a:buSzPts val="1900"/>
               <a:buChar char="▪"/>
             </a:pPr>
             <a:r>
-              <a:rPr lang="pt-BR" sz="2800"/>
-              <a:t>Motivation</a:t>
+              <a:rPr lang="pt-BR" sz="1900"/>
+              <a:t>Mobile Ad Hoc Networks is a possible scenario to simulate.</a:t>
             </a:r>
-            <a:endParaRPr/>
+            <a:endParaRPr sz="1900"/>
           </a:p>
           <a:p>
-            <a:pPr indent="-231775" lvl="0" marL="231775" marR="0" rtl="0" algn="l">
-              <a:spcBef>
-                <a:spcPts val="560"/>
-              </a:spcBef>
-              <a:spcAft>
-                <a:spcPts val="0"/>
-              </a:spcAft>
-              <a:buClr>
-                <a:schemeClr val="dk1"/>
-              </a:buClr>
-              <a:buSzPts val="2800"/>
-              <a:buFont typeface="Noto Sans Symbols"/>
+            <a:pPr indent="-349250" lvl="0" marL="457200" marR="0" rtl="0" algn="l">
+              <a:spcBef>
+                <a:spcPts val="0"/>
+              </a:spcBef>
+              <a:spcAft>
+                <a:spcPts val="0"/>
+              </a:spcAft>
+              <a:buSzPts val="1900"/>
               <a:buChar char="▪"/>
             </a:pPr>
             <a:r>
-              <a:rPr lang="pt-BR" sz="2800"/>
-              <a:t>Related work</a:t>
+              <a:rPr lang="pt-BR" sz="1900"/>
+              <a:t>Mobility models dictate how nodes move around.</a:t>
             </a:r>
-            <a:endParaRPr/>
+            <a:endParaRPr sz="1900"/>
           </a:p>
           <a:p>
-            <a:pPr indent="-231775" lvl="0" marL="231775" marR="0" rtl="0" algn="l">
-              <a:spcBef>
-                <a:spcPts val="560"/>
-              </a:spcBef>
-              <a:spcAft>
-                <a:spcPts val="0"/>
-              </a:spcAft>
-              <a:buClr>
-                <a:schemeClr val="dk1"/>
-              </a:buClr>
-              <a:buSzPts val="2800"/>
-              <a:buFont typeface="Noto Sans Symbols"/>
+            <a:pPr indent="-349250" lvl="0" marL="457200" marR="0" rtl="0" algn="l">
+              <a:spcBef>
+                <a:spcPts val="0"/>
+              </a:spcBef>
+              <a:spcAft>
+                <a:spcPts val="0"/>
+              </a:spcAft>
+              <a:buSzPts val="1900"/>
               <a:buChar char="▪"/>
             </a:pPr>
             <a:r>
-              <a:rPr lang="pt-BR" sz="2800"/>
-              <a:t>Multi-radio multi-channel path assignment</a:t>
+              <a:rPr lang="pt-BR" sz="1900"/>
+              <a:t>Physical objects (i.e. buildings) are accounted from a communications perspective but not from a mobility model point-of-view.</a:t>
             </a:r>
-            <a:endParaRPr b="0" i="0" sz="2400" u="none" cap="none" strike="noStrike">
-              <a:solidFill>
-                <a:schemeClr val="dk1"/>
-              </a:solidFill>
-              <a:latin typeface="Calibri"/>
-              <a:ea typeface="Calibri"/>
-              <a:cs typeface="Calibri"/>
-              <a:sym typeface="Calibri"/>
-            </a:endParaRPr>
+            <a:endParaRPr sz="1900"/>
           </a:p>
           <a:p>
-            <a:pPr indent="-231775" lvl="0" marL="231775" marR="0" rtl="0" algn="l">
-              <a:spcBef>
-                <a:spcPts val="560"/>
-              </a:spcBef>
-              <a:spcAft>
-                <a:spcPts val="0"/>
-              </a:spcAft>
-              <a:buClr>
-                <a:srgbClr val="FF0000"/>
-              </a:buClr>
-              <a:buSzPts val="2800"/>
-              <a:buFont typeface="Noto Sans Symbols"/>
-              <a:buChar char="▪"/>
+            <a:pPr indent="0" lvl="0" marL="0" marR="0" rtl="0" algn="l">
+              <a:spcBef>
+                <a:spcPts val="400"/>
+              </a:spcBef>
+              <a:spcAft>
+                <a:spcPts val="0"/>
+              </a:spcAft>
+              <a:buNone/>
             </a:pPr>
             <a:r>
-              <a:rPr lang="pt-BR" sz="2800">
-                <a:solidFill>
-                  <a:srgbClr val="FF0000"/>
-                </a:solidFill>
-              </a:rPr>
-              <a:t>3D obstacle compliant mobility model</a:t>
+              <a:t/>
             </a:r>
-            <a:endParaRPr>
-              <a:solidFill>
-                <a:srgbClr val="FF0000"/>
-              </a:solidFill>
-            </a:endParaRPr>
-          </a:p>
-          <a:p>
-            <a:pPr indent="-231775" lvl="0" marL="231775" marR="0" rtl="0" algn="l">
-              <a:spcBef>
-                <a:spcPts val="560"/>
-              </a:spcBef>
-              <a:spcAft>
-                <a:spcPts val="0"/>
-              </a:spcAft>
-              <a:buClr>
-                <a:schemeClr val="dk1"/>
-              </a:buClr>
-              <a:buSzPts val="2800"/>
-              <a:buFont typeface="Noto Sans Symbols"/>
-              <a:buChar char="▪"/>
-            </a:pPr>
-            <a:r>
-              <a:rPr b="0" i="0" lang="pt-BR" sz="2800" u="none" cap="none" strike="noStrike">
-                <a:solidFill>
-                  <a:schemeClr val="dk1"/>
-                </a:solidFill>
-                <a:latin typeface="Calibri"/>
-                <a:ea typeface="Calibri"/>
-                <a:cs typeface="Calibri"/>
-                <a:sym typeface="Calibri"/>
-              </a:rPr>
-              <a:t>Conclusion and future work</a:t>
-            </a:r>
-            <a:endParaRPr/>
+            <a:endParaRPr sz="1900"/>
           </a:p>
         </p:txBody>
       </p:sp>
       <p:sp>
         <p:nvSpPr>
-          <p:cNvPr id="132" name="Google Shape;132;p21"/>
+          <p:cNvPr id="131" name="Google Shape;131;p21"/>
           <p:cNvSpPr txBox="1"/>
           <p:nvPr>
             <p:ph idx="4294967295" type="sldNum"/>
@@ -19310,11 +18129,314 @@
           </a:p>
         </p:txBody>
       </p:sp>
+      <p:pic>
+        <p:nvPicPr>
+          <p:cNvPr id="132" name="Google Shape;132;p21"/>
+          <p:cNvPicPr preferRelativeResize="0"/>
+          <p:nvPr/>
+        </p:nvPicPr>
+        <p:blipFill>
+          <a:blip r:embed="rId3">
+            <a:alphaModFix/>
+          </a:blip>
+          <a:stretch>
+            <a:fillRect/>
+          </a:stretch>
+        </p:blipFill>
+        <p:spPr>
+          <a:xfrm>
+            <a:off x="5057975" y="4022122"/>
+            <a:ext cx="3781226" cy="721325"/>
+          </a:xfrm>
+          <a:prstGeom prst="rect">
+            <a:avLst/>
+          </a:prstGeom>
+          <a:noFill/>
+          <a:ln>
+            <a:noFill/>
+          </a:ln>
+        </p:spPr>
+      </p:pic>
     </p:spTree>
   </p:cSld>
   <p:clrMapOvr>
     <a:masterClrMapping/>
   </p:clrMapOvr>
+  <p:timing>
+    <p:tnLst>
+      <p:par>
+        <p:cTn dur="indefinite" nodeType="tmRoot" restart="never">
+          <p:childTnLst>
+            <p:seq concurrent="1" nextAc="seek">
+              <p:cTn dur="indefinite" id="2" nodeType="mainSeq">
+                <p:childTnLst>
+                  <p:par>
+                    <p:cTn fill="hold">
+                      <p:stCondLst>
+                        <p:cond delay="indefinite"/>
+                      </p:stCondLst>
+                      <p:childTnLst>
+                        <p:par>
+                          <p:cTn fill="hold">
+                            <p:stCondLst>
+                              <p:cond delay="0"/>
+                            </p:stCondLst>
+                            <p:childTnLst>
+                              <p:par>
+                                <p:cTn fill="hold" nodeType="clickEffect" presetClass="entr" presetID="1" presetSubtype="0">
+                                  <p:stCondLst>
+                                    <p:cond delay="0"/>
+                                  </p:stCondLst>
+                                  <p:childTnLst>
+                                    <p:set>
+                                      <p:cBhvr>
+                                        <p:cTn dur="1" fill="hold">
+                                          <p:stCondLst>
+                                            <p:cond delay="0"/>
+                                          </p:stCondLst>
+                                        </p:cTn>
+                                        <p:tgtEl>
+                                          <p:spTgt spid="130">
+                                            <p:txEl>
+                                              <p:pRg end="0" st="0"/>
+                                            </p:txEl>
+                                          </p:spTgt>
+                                        </p:tgtEl>
+                                        <p:attrNameLst>
+                                          <p:attrName>style.visibility</p:attrName>
+                                        </p:attrNameLst>
+                                      </p:cBhvr>
+                                      <p:to>
+                                        <p:strVal val="visible"/>
+                                      </p:to>
+                                    </p:set>
+                                  </p:childTnLst>
+                                </p:cTn>
+                              </p:par>
+                            </p:childTnLst>
+                          </p:cTn>
+                        </p:par>
+                      </p:childTnLst>
+                    </p:cTn>
+                  </p:par>
+                  <p:par>
+                    <p:cTn fill="hold">
+                      <p:stCondLst>
+                        <p:cond delay="indefinite"/>
+                      </p:stCondLst>
+                      <p:childTnLst>
+                        <p:par>
+                          <p:cTn fill="hold">
+                            <p:stCondLst>
+                              <p:cond delay="0"/>
+                            </p:stCondLst>
+                            <p:childTnLst>
+                              <p:par>
+                                <p:cTn fill="hold" nodeType="clickEffect" presetClass="entr" presetID="1" presetSubtype="0">
+                                  <p:stCondLst>
+                                    <p:cond delay="0"/>
+                                  </p:stCondLst>
+                                  <p:childTnLst>
+                                    <p:set>
+                                      <p:cBhvr>
+                                        <p:cTn dur="1" fill="hold">
+                                          <p:stCondLst>
+                                            <p:cond delay="0"/>
+                                          </p:stCondLst>
+                                        </p:cTn>
+                                        <p:tgtEl>
+                                          <p:spTgt spid="130">
+                                            <p:txEl>
+                                              <p:pRg end="1" st="1"/>
+                                            </p:txEl>
+                                          </p:spTgt>
+                                        </p:tgtEl>
+                                        <p:attrNameLst>
+                                          <p:attrName>style.visibility</p:attrName>
+                                        </p:attrNameLst>
+                                      </p:cBhvr>
+                                      <p:to>
+                                        <p:strVal val="visible"/>
+                                      </p:to>
+                                    </p:set>
+                                  </p:childTnLst>
+                                </p:cTn>
+                              </p:par>
+                            </p:childTnLst>
+                          </p:cTn>
+                        </p:par>
+                      </p:childTnLst>
+                    </p:cTn>
+                  </p:par>
+                  <p:par>
+                    <p:cTn fill="hold">
+                      <p:stCondLst>
+                        <p:cond delay="indefinite"/>
+                      </p:stCondLst>
+                      <p:childTnLst>
+                        <p:par>
+                          <p:cTn fill="hold">
+                            <p:stCondLst>
+                              <p:cond delay="0"/>
+                            </p:stCondLst>
+                            <p:childTnLst>
+                              <p:par>
+                                <p:cTn fill="hold" nodeType="clickEffect" presetClass="entr" presetID="1" presetSubtype="0">
+                                  <p:stCondLst>
+                                    <p:cond delay="0"/>
+                                  </p:stCondLst>
+                                  <p:childTnLst>
+                                    <p:set>
+                                      <p:cBhvr>
+                                        <p:cTn dur="1" fill="hold">
+                                          <p:stCondLst>
+                                            <p:cond delay="0"/>
+                                          </p:stCondLst>
+                                        </p:cTn>
+                                        <p:tgtEl>
+                                          <p:spTgt spid="130">
+                                            <p:txEl>
+                                              <p:pRg end="2" st="2"/>
+                                            </p:txEl>
+                                          </p:spTgt>
+                                        </p:tgtEl>
+                                        <p:attrNameLst>
+                                          <p:attrName>style.visibility</p:attrName>
+                                        </p:attrNameLst>
+                                      </p:cBhvr>
+                                      <p:to>
+                                        <p:strVal val="visible"/>
+                                      </p:to>
+                                    </p:set>
+                                  </p:childTnLst>
+                                </p:cTn>
+                              </p:par>
+                            </p:childTnLst>
+                          </p:cTn>
+                        </p:par>
+                      </p:childTnLst>
+                    </p:cTn>
+                  </p:par>
+                  <p:par>
+                    <p:cTn fill="hold">
+                      <p:stCondLst>
+                        <p:cond delay="indefinite"/>
+                      </p:stCondLst>
+                      <p:childTnLst>
+                        <p:par>
+                          <p:cTn fill="hold">
+                            <p:stCondLst>
+                              <p:cond delay="0"/>
+                            </p:stCondLst>
+                            <p:childTnLst>
+                              <p:par>
+                                <p:cTn fill="hold" nodeType="clickEffect" presetClass="entr" presetID="1" presetSubtype="0">
+                                  <p:stCondLst>
+                                    <p:cond delay="0"/>
+                                  </p:stCondLst>
+                                  <p:childTnLst>
+                                    <p:set>
+                                      <p:cBhvr>
+                                        <p:cTn dur="1" fill="hold">
+                                          <p:stCondLst>
+                                            <p:cond delay="0"/>
+                                          </p:stCondLst>
+                                        </p:cTn>
+                                        <p:tgtEl>
+                                          <p:spTgt spid="130">
+                                            <p:txEl>
+                                              <p:pRg end="3" st="3"/>
+                                            </p:txEl>
+                                          </p:spTgt>
+                                        </p:tgtEl>
+                                        <p:attrNameLst>
+                                          <p:attrName>style.visibility</p:attrName>
+                                        </p:attrNameLst>
+                                      </p:cBhvr>
+                                      <p:to>
+                                        <p:strVal val="visible"/>
+                                      </p:to>
+                                    </p:set>
+                                  </p:childTnLst>
+                                </p:cTn>
+                              </p:par>
+                            </p:childTnLst>
+                          </p:cTn>
+                        </p:par>
+                      </p:childTnLst>
+                    </p:cTn>
+                  </p:par>
+                  <p:par>
+                    <p:cTn fill="hold">
+                      <p:stCondLst>
+                        <p:cond delay="indefinite"/>
+                      </p:stCondLst>
+                      <p:childTnLst>
+                        <p:par>
+                          <p:cTn fill="hold">
+                            <p:stCondLst>
+                              <p:cond delay="0"/>
+                            </p:stCondLst>
+                            <p:childTnLst>
+                              <p:par>
+                                <p:cTn fill="hold" nodeType="clickEffect" presetClass="entr" presetID="1" presetSubtype="0">
+                                  <p:stCondLst>
+                                    <p:cond delay="0"/>
+                                  </p:stCondLst>
+                                  <p:childTnLst>
+                                    <p:set>
+                                      <p:cBhvr>
+                                        <p:cTn dur="1" fill="hold">
+                                          <p:stCondLst>
+                                            <p:cond delay="0"/>
+                                          </p:stCondLst>
+                                        </p:cTn>
+                                        <p:tgtEl>
+                                          <p:spTgt spid="130">
+                                            <p:txEl>
+                                              <p:pRg end="4" st="4"/>
+                                            </p:txEl>
+                                          </p:spTgt>
+                                        </p:tgtEl>
+                                        <p:attrNameLst>
+                                          <p:attrName>style.visibility</p:attrName>
+                                        </p:attrNameLst>
+                                      </p:cBhvr>
+                                      <p:to>
+                                        <p:strVal val="visible"/>
+                                      </p:to>
+                                    </p:set>
+                                  </p:childTnLst>
+                                </p:cTn>
+                              </p:par>
+                            </p:childTnLst>
+                          </p:cTn>
+                        </p:par>
+                      </p:childTnLst>
+                    </p:cTn>
+                  </p:par>
+                </p:childTnLst>
+              </p:cTn>
+              <p:prevCondLst>
+                <p:cond evt="onPrev">
+                  <p:tgtEl>
+                    <p:sldTgt/>
+                  </p:tgtEl>
+                </p:cond>
+              </p:prevCondLst>
+              <p:nextCondLst>
+                <p:cond evt="onNext">
+                  <p:tgtEl>
+                    <p:sldTgt/>
+                  </p:tgtEl>
+                </p:cond>
+              </p:nextCondLst>
+            </p:seq>
+          </p:childTnLst>
+        </p:cTn>
+      </p:par>
+    </p:tnLst>
+  </p:timing>
 </p:sld>
 </file>
 
@@ -19372,11 +18494,15 @@
               <a:spcAft>
                 <a:spcPts val="0"/>
               </a:spcAft>
+              <a:buClr>
+                <a:srgbClr val="000000"/>
+              </a:buClr>
+              <a:buFont typeface="Arial"/>
               <a:buNone/>
             </a:pPr>
             <a:r>
               <a:rPr lang="pt-BR"/>
-              <a:t>3D obstacle compliant mobility model</a:t>
+              <a:t>Existing Models</a:t>
             </a:r>
             <a:endParaRPr b="1" i="0" sz="2800" u="none" cap="none" strike="noStrike">
               <a:solidFill>
@@ -19417,87 +18543,289 @@
           </a:bodyPr>
           <a:lstStyle/>
           <a:p>
-            <a:pPr indent="-349250" lvl="0" marL="457200" marR="0" rtl="0" algn="l">
-              <a:spcBef>
-                <a:spcPts val="400"/>
-              </a:spcBef>
-              <a:spcAft>
-                <a:spcPts val="0"/>
-              </a:spcAft>
+            <a:pPr indent="-225425" lvl="0" marL="231775" marR="0" rtl="0" algn="l">
+              <a:spcBef>
+                <a:spcPts val="0"/>
+              </a:spcBef>
+              <a:spcAft>
+                <a:spcPts val="0"/>
+              </a:spcAft>
+              <a:buClr>
+                <a:schemeClr val="dk1"/>
+              </a:buClr>
               <a:buSzPts val="1900"/>
+              <a:buFont typeface="Noto Sans Symbols"/>
               <a:buChar char="▪"/>
             </a:pPr>
             <a:r>
-              <a:rPr lang="pt-BR" sz="1900"/>
-              <a:t>Network simulator (ns-3) provide vast amount of libraries to allow simulations of different communications scenarios and technologies.</a:t>
+              <a:rPr b="0" i="0" lang="pt-BR" sz="1900" u="none" cap="none" strike="noStrike">
+                <a:solidFill>
+                  <a:schemeClr val="dk1"/>
+                </a:solidFill>
+                <a:latin typeface="Calibri"/>
+                <a:ea typeface="Calibri"/>
+                <a:cs typeface="Calibri"/>
+                <a:sym typeface="Calibri"/>
+              </a:rPr>
+              <a:t>Random Walk (2D):</a:t>
             </a:r>
             <a:endParaRPr sz="1900"/>
           </a:p>
           <a:p>
-            <a:pPr indent="-349250" lvl="0" marL="457200" marR="0" rtl="0" algn="l">
-              <a:spcBef>
-                <a:spcPts val="0"/>
-              </a:spcBef>
-              <a:spcAft>
-                <a:spcPts val="0"/>
-              </a:spcAft>
+            <a:pPr indent="-279400" lvl="1" marL="742950" marR="0" rtl="0" algn="l">
+              <a:spcBef>
+                <a:spcPts val="400"/>
+              </a:spcBef>
+              <a:spcAft>
+                <a:spcPts val="0"/>
+              </a:spcAft>
+              <a:buClr>
+                <a:schemeClr val="dk1"/>
+              </a:buClr>
               <a:buSzPts val="1900"/>
-              <a:buChar char="▪"/>
+              <a:buFont typeface="Merriweather Sans"/>
+              <a:buChar char="−"/>
             </a:pPr>
             <a:r>
               <a:rPr lang="pt-BR" sz="1900"/>
-              <a:t>Mobile Ad Hoc Networks is a possible scenario to simulate.</a:t>
+              <a:t>M</a:t>
+            </a:r>
+            <a:r>
+              <a:rPr b="0" i="0" lang="pt-BR" sz="1900" u="none" cap="none" strike="noStrike">
+                <a:solidFill>
+                  <a:schemeClr val="dk1"/>
+                </a:solidFill>
+                <a:latin typeface="Calibri"/>
+                <a:ea typeface="Calibri"/>
+                <a:cs typeface="Calibri"/>
+                <a:sym typeface="Calibri"/>
+              </a:rPr>
+              <a:t>ove in a straight line for a determined amount of time.</a:t>
             </a:r>
             <a:endParaRPr sz="1900"/>
           </a:p>
           <a:p>
-            <a:pPr indent="-349250" lvl="0" marL="457200" marR="0" rtl="0" algn="l">
-              <a:spcBef>
-                <a:spcPts val="0"/>
-              </a:spcBef>
-              <a:spcAft>
-                <a:spcPts val="0"/>
-              </a:spcAft>
+            <a:pPr indent="-279400" lvl="1" marL="742950" marR="0" rtl="0" algn="l">
+              <a:spcBef>
+                <a:spcPts val="400"/>
+              </a:spcBef>
+              <a:spcAft>
+                <a:spcPts val="0"/>
+              </a:spcAft>
+              <a:buClr>
+                <a:schemeClr val="dk1"/>
+              </a:buClr>
               <a:buSzPts val="1900"/>
-              <a:buChar char="▪"/>
+              <a:buFont typeface="Merriweather Sans"/>
+              <a:buChar char="−"/>
             </a:pPr>
             <a:r>
-              <a:rPr lang="pt-BR" sz="1900"/>
-              <a:t>Mobility models dictate how nodes move around.</a:t>
+              <a:rPr b="0" i="0" lang="pt-BR" sz="1900" u="none" cap="none" strike="noStrike">
+                <a:solidFill>
+                  <a:schemeClr val="dk1"/>
+                </a:solidFill>
+                <a:latin typeface="Calibri"/>
+                <a:ea typeface="Calibri"/>
+                <a:cs typeface="Calibri"/>
+                <a:sym typeface="Calibri"/>
+              </a:rPr>
+              <a:t>Randomly choose new parameters.</a:t>
             </a:r>
             <a:endParaRPr sz="1900"/>
           </a:p>
           <a:p>
-            <a:pPr indent="-349250" lvl="0" marL="457200" marR="0" rtl="0" algn="l">
-              <a:spcBef>
-                <a:spcPts val="0"/>
-              </a:spcBef>
-              <a:spcAft>
-                <a:spcPts val="0"/>
-              </a:spcAft>
+            <a:pPr indent="-225425" lvl="0" marL="231775" marR="0" rtl="0" algn="l">
+              <a:spcBef>
+                <a:spcPts val="400"/>
+              </a:spcBef>
+              <a:spcAft>
+                <a:spcPts val="0"/>
+              </a:spcAft>
+              <a:buClr>
+                <a:schemeClr val="dk1"/>
+              </a:buClr>
               <a:buSzPts val="1900"/>
+              <a:buFont typeface="Noto Sans Symbols"/>
               <a:buChar char="▪"/>
             </a:pPr>
             <a:r>
-              <a:rPr lang="pt-BR" sz="1900"/>
-              <a:t>Physical objects (i.e. buildings) are accounted from a communications perspective but not from a mobility model point-of-view.</a:t>
+              <a:rPr b="0" i="0" lang="pt-BR" sz="1900" u="none" cap="none" strike="noStrike">
+                <a:solidFill>
+                  <a:schemeClr val="dk1"/>
+                </a:solidFill>
+                <a:latin typeface="Calibri"/>
+                <a:ea typeface="Calibri"/>
+                <a:cs typeface="Calibri"/>
+                <a:sym typeface="Calibri"/>
+              </a:rPr>
+              <a:t>Random Direction (2D):</a:t>
             </a:r>
             <a:endParaRPr sz="1900"/>
           </a:p>
           <a:p>
-            <a:pPr indent="0" lvl="0" marL="0" marR="0" rtl="0" algn="l">
+            <a:pPr indent="-279400" lvl="1" marL="742950" marR="0" rtl="0" algn="l">
               <a:spcBef>
                 <a:spcPts val="400"/>
               </a:spcBef>
               <a:spcAft>
                 <a:spcPts val="0"/>
               </a:spcAft>
-              <a:buNone/>
+              <a:buClr>
+                <a:schemeClr val="dk1"/>
+              </a:buClr>
+              <a:buSzPts val="1900"/>
+              <a:buFont typeface="Merriweather Sans"/>
+              <a:buChar char="−"/>
             </a:pPr>
             <a:r>
-              <a:t/>
+              <a:rPr b="0" i="0" lang="pt-BR" sz="1900" u="none" cap="none" strike="noStrike">
+                <a:solidFill>
+                  <a:schemeClr val="dk1"/>
+                </a:solidFill>
+                <a:latin typeface="Calibri"/>
+                <a:ea typeface="Calibri"/>
+                <a:cs typeface="Calibri"/>
+                <a:sym typeface="Calibri"/>
+              </a:rPr>
+              <a:t>A node moves in straight line until it reaches the boundary.</a:t>
             </a:r>
             <a:endParaRPr sz="1900"/>
+          </a:p>
+          <a:p>
+            <a:pPr indent="-279400" lvl="1" marL="742950" marR="0" rtl="0" algn="l">
+              <a:spcBef>
+                <a:spcPts val="400"/>
+              </a:spcBef>
+              <a:spcAft>
+                <a:spcPts val="0"/>
+              </a:spcAft>
+              <a:buClr>
+                <a:schemeClr val="dk1"/>
+              </a:buClr>
+              <a:buSzPts val="1900"/>
+              <a:buFont typeface="Merriweather Sans"/>
+              <a:buChar char="−"/>
+            </a:pPr>
+            <a:r>
+              <a:rPr b="0" i="0" lang="pt-BR" sz="1900" u="none" cap="none" strike="noStrike">
+                <a:solidFill>
+                  <a:schemeClr val="dk1"/>
+                </a:solidFill>
+                <a:latin typeface="Calibri"/>
+                <a:ea typeface="Calibri"/>
+                <a:cs typeface="Calibri"/>
+                <a:sym typeface="Calibri"/>
+              </a:rPr>
+              <a:t>Randomly chooses new parameters</a:t>
+            </a:r>
+            <a:r>
+              <a:rPr lang="pt-BR" sz="1900"/>
+              <a:t>.</a:t>
+            </a:r>
+            <a:endParaRPr sz="1900"/>
+          </a:p>
+          <a:p>
+            <a:pPr indent="-225425" lvl="0" marL="231775" marR="0" rtl="0" algn="l">
+              <a:spcBef>
+                <a:spcPts val="400"/>
+              </a:spcBef>
+              <a:spcAft>
+                <a:spcPts val="0"/>
+              </a:spcAft>
+              <a:buClr>
+                <a:schemeClr val="dk1"/>
+              </a:buClr>
+              <a:buSzPts val="1900"/>
+              <a:buFont typeface="Noto Sans Symbols"/>
+              <a:buChar char="▪"/>
+            </a:pPr>
+            <a:r>
+              <a:rPr b="0" i="0" lang="pt-BR" sz="1900" u="none" cap="none" strike="noStrike">
+                <a:solidFill>
+                  <a:schemeClr val="dk1"/>
+                </a:solidFill>
+                <a:latin typeface="Calibri"/>
+                <a:ea typeface="Calibri"/>
+                <a:cs typeface="Calibri"/>
+                <a:sym typeface="Calibri"/>
+              </a:rPr>
+              <a:t>Gauss-Markov (3D):</a:t>
+            </a:r>
+            <a:endParaRPr sz="1900"/>
+          </a:p>
+          <a:p>
+            <a:pPr indent="-279400" lvl="1" marL="742950" marR="0" rtl="0" algn="l">
+              <a:spcBef>
+                <a:spcPts val="400"/>
+              </a:spcBef>
+              <a:spcAft>
+                <a:spcPts val="0"/>
+              </a:spcAft>
+              <a:buClr>
+                <a:schemeClr val="dk1"/>
+              </a:buClr>
+              <a:buSzPts val="1900"/>
+              <a:buFont typeface="Merriweather Sans"/>
+              <a:buChar char="−"/>
+            </a:pPr>
+            <a:r>
+              <a:rPr lang="pt-BR" sz="1900"/>
+              <a:t>M</a:t>
+            </a:r>
+            <a:r>
+              <a:rPr b="0" i="0" lang="pt-BR" sz="1900" u="none" cap="none" strike="noStrike">
+                <a:solidFill>
+                  <a:schemeClr val="dk1"/>
+                </a:solidFill>
+                <a:latin typeface="Calibri"/>
+                <a:ea typeface="Calibri"/>
+                <a:cs typeface="Calibri"/>
+                <a:sym typeface="Calibri"/>
+              </a:rPr>
+              <a:t>oves for a certain time before changing parameters.</a:t>
+            </a:r>
+            <a:endParaRPr sz="1900"/>
+          </a:p>
+          <a:p>
+            <a:pPr indent="-279400" lvl="1" marL="742950" marR="0" rtl="0" algn="l">
+              <a:spcBef>
+                <a:spcPts val="400"/>
+              </a:spcBef>
+              <a:spcAft>
+                <a:spcPts val="0"/>
+              </a:spcAft>
+              <a:buClr>
+                <a:schemeClr val="dk1"/>
+              </a:buClr>
+              <a:buSzPts val="1900"/>
+              <a:buFont typeface="Merriweather Sans"/>
+              <a:buChar char="−"/>
+            </a:pPr>
+            <a:r>
+              <a:rPr b="0" i="0" lang="pt-BR" sz="1900" u="none" cap="none" strike="noStrike">
+                <a:solidFill>
+                  <a:schemeClr val="dk1"/>
+                </a:solidFill>
+                <a:latin typeface="Calibri"/>
+                <a:ea typeface="Calibri"/>
+                <a:cs typeface="Calibri"/>
+                <a:sym typeface="Calibri"/>
+              </a:rPr>
+              <a:t>Parameters can be constrained by random distributed variables</a:t>
+            </a:r>
+            <a:r>
+              <a:rPr lang="pt-BR" sz="1900"/>
+              <a:t>.</a:t>
+            </a:r>
+            <a:endParaRPr b="0" i="0" sz="1900" u="none" cap="none" strike="noStrike">
+              <a:solidFill>
+                <a:schemeClr val="dk1"/>
+              </a:solidFill>
+              <a:latin typeface="Calibri"/>
+              <a:ea typeface="Calibri"/>
+              <a:cs typeface="Calibri"/>
+              <a:sym typeface="Calibri"/>
+            </a:endParaRPr>
           </a:p>
         </p:txBody>
       </p:sp>
@@ -19549,34 +18877,6 @@
           </a:p>
         </p:txBody>
       </p:sp>
-      <p:pic>
-        <p:nvPicPr>
-          <p:cNvPr id="140" name="Google Shape;140;p22"/>
-          <p:cNvPicPr preferRelativeResize="0"/>
-          <p:nvPr/>
-        </p:nvPicPr>
-        <p:blipFill>
-          <a:blip r:embed="rId3">
-            <a:alphaModFix/>
-          </a:blip>
-          <a:stretch>
-            <a:fillRect/>
-          </a:stretch>
-        </p:blipFill>
-        <p:spPr>
-          <a:xfrm>
-            <a:off x="5057975" y="4022122"/>
-            <a:ext cx="3781226" cy="721325"/>
-          </a:xfrm>
-          <a:prstGeom prst="rect">
-            <a:avLst/>
-          </a:prstGeom>
-          <a:noFill/>
-          <a:ln>
-            <a:noFill/>
-          </a:ln>
-        </p:spPr>
-      </p:pic>
     </p:spTree>
   </p:cSld>
   <p:clrMapOvr>
@@ -19815,6 +19115,202 @@
                                           <p:spTgt spid="138">
                                             <p:txEl>
                                               <p:pRg end="4" st="4"/>
+                                            </p:txEl>
+                                          </p:spTgt>
+                                        </p:tgtEl>
+                                        <p:attrNameLst>
+                                          <p:attrName>style.visibility</p:attrName>
+                                        </p:attrNameLst>
+                                      </p:cBhvr>
+                                      <p:to>
+                                        <p:strVal val="visible"/>
+                                      </p:to>
+                                    </p:set>
+                                  </p:childTnLst>
+                                </p:cTn>
+                              </p:par>
+                            </p:childTnLst>
+                          </p:cTn>
+                        </p:par>
+                      </p:childTnLst>
+                    </p:cTn>
+                  </p:par>
+                  <p:par>
+                    <p:cTn fill="hold">
+                      <p:stCondLst>
+                        <p:cond delay="indefinite"/>
+                      </p:stCondLst>
+                      <p:childTnLst>
+                        <p:par>
+                          <p:cTn fill="hold">
+                            <p:stCondLst>
+                              <p:cond delay="0"/>
+                            </p:stCondLst>
+                            <p:childTnLst>
+                              <p:par>
+                                <p:cTn fill="hold" nodeType="clickEffect" presetClass="entr" presetID="1" presetSubtype="0">
+                                  <p:stCondLst>
+                                    <p:cond delay="0"/>
+                                  </p:stCondLst>
+                                  <p:childTnLst>
+                                    <p:set>
+                                      <p:cBhvr>
+                                        <p:cTn dur="1" fill="hold">
+                                          <p:stCondLst>
+                                            <p:cond delay="0"/>
+                                          </p:stCondLst>
+                                        </p:cTn>
+                                        <p:tgtEl>
+                                          <p:spTgt spid="138">
+                                            <p:txEl>
+                                              <p:pRg end="5" st="5"/>
+                                            </p:txEl>
+                                          </p:spTgt>
+                                        </p:tgtEl>
+                                        <p:attrNameLst>
+                                          <p:attrName>style.visibility</p:attrName>
+                                        </p:attrNameLst>
+                                      </p:cBhvr>
+                                      <p:to>
+                                        <p:strVal val="visible"/>
+                                      </p:to>
+                                    </p:set>
+                                  </p:childTnLst>
+                                </p:cTn>
+                              </p:par>
+                            </p:childTnLst>
+                          </p:cTn>
+                        </p:par>
+                      </p:childTnLst>
+                    </p:cTn>
+                  </p:par>
+                  <p:par>
+                    <p:cTn fill="hold">
+                      <p:stCondLst>
+                        <p:cond delay="indefinite"/>
+                      </p:stCondLst>
+                      <p:childTnLst>
+                        <p:par>
+                          <p:cTn fill="hold">
+                            <p:stCondLst>
+                              <p:cond delay="0"/>
+                            </p:stCondLst>
+                            <p:childTnLst>
+                              <p:par>
+                                <p:cTn fill="hold" nodeType="clickEffect" presetClass="entr" presetID="1" presetSubtype="0">
+                                  <p:stCondLst>
+                                    <p:cond delay="0"/>
+                                  </p:stCondLst>
+                                  <p:childTnLst>
+                                    <p:set>
+                                      <p:cBhvr>
+                                        <p:cTn dur="1" fill="hold">
+                                          <p:stCondLst>
+                                            <p:cond delay="0"/>
+                                          </p:stCondLst>
+                                        </p:cTn>
+                                        <p:tgtEl>
+                                          <p:spTgt spid="138">
+                                            <p:txEl>
+                                              <p:pRg end="6" st="6"/>
+                                            </p:txEl>
+                                          </p:spTgt>
+                                        </p:tgtEl>
+                                        <p:attrNameLst>
+                                          <p:attrName>style.visibility</p:attrName>
+                                        </p:attrNameLst>
+                                      </p:cBhvr>
+                                      <p:to>
+                                        <p:strVal val="visible"/>
+                                      </p:to>
+                                    </p:set>
+                                  </p:childTnLst>
+                                </p:cTn>
+                              </p:par>
+                            </p:childTnLst>
+                          </p:cTn>
+                        </p:par>
+                      </p:childTnLst>
+                    </p:cTn>
+                  </p:par>
+                  <p:par>
+                    <p:cTn fill="hold">
+                      <p:stCondLst>
+                        <p:cond delay="indefinite"/>
+                      </p:stCondLst>
+                      <p:childTnLst>
+                        <p:par>
+                          <p:cTn fill="hold">
+                            <p:stCondLst>
+                              <p:cond delay="0"/>
+                            </p:stCondLst>
+                            <p:childTnLst>
+                              <p:par>
+                                <p:cTn fill="hold" nodeType="clickEffect" presetClass="entr" presetID="1" presetSubtype="0">
+                                  <p:stCondLst>
+                                    <p:cond delay="0"/>
+                                  </p:stCondLst>
+                                  <p:childTnLst>
+                                    <p:set>
+                                      <p:cBhvr>
+                                        <p:cTn dur="1" fill="hold">
+                                          <p:stCondLst>
+                                            <p:cond delay="0"/>
+                                          </p:stCondLst>
+                                        </p:cTn>
+                                        <p:tgtEl>
+                                          <p:spTgt spid="138">
+                                            <p:txEl>
+                                              <p:pRg end="7" st="7"/>
+                                            </p:txEl>
+                                          </p:spTgt>
+                                        </p:tgtEl>
+                                        <p:attrNameLst>
+                                          <p:attrName>style.visibility</p:attrName>
+                                        </p:attrNameLst>
+                                      </p:cBhvr>
+                                      <p:to>
+                                        <p:strVal val="visible"/>
+                                      </p:to>
+                                    </p:set>
+                                  </p:childTnLst>
+                                </p:cTn>
+                              </p:par>
+                            </p:childTnLst>
+                          </p:cTn>
+                        </p:par>
+                      </p:childTnLst>
+                    </p:cTn>
+                  </p:par>
+                  <p:par>
+                    <p:cTn fill="hold">
+                      <p:stCondLst>
+                        <p:cond delay="indefinite"/>
+                      </p:stCondLst>
+                      <p:childTnLst>
+                        <p:par>
+                          <p:cTn fill="hold">
+                            <p:stCondLst>
+                              <p:cond delay="0"/>
+                            </p:stCondLst>
+                            <p:childTnLst>
+                              <p:par>
+                                <p:cTn fill="hold" nodeType="clickEffect" presetClass="entr" presetID="1" presetSubtype="0">
+                                  <p:stCondLst>
+                                    <p:cond delay="0"/>
+                                  </p:stCondLst>
+                                  <p:childTnLst>
+                                    <p:set>
+                                      <p:cBhvr>
+                                        <p:cTn dur="1" fill="hold">
+                                          <p:stCondLst>
+                                            <p:cond delay="0"/>
+                                          </p:stCondLst>
+                                        </p:cTn>
+                                        <p:tgtEl>
+                                          <p:spTgt spid="138">
+                                            <p:txEl>
+                                              <p:pRg end="8" st="8"/>
                                             </p:txEl>
                                           </p:spTgt>
                                         </p:tgtEl>
